--- a/docs/EV_Dashboard_User_Guide.pptx
+++ b/docs/EV_Dashboard_User_Guide.pptx
@@ -3838,6 +3838,10 @@
             <a:prstDash val="solid"/>
           </a:ln>
         </p:spPr>
+        <p:txBody>
+          <a:bodyPr/>
+          <a:p/>
+        </p:txBody>
       </p:sp>
       <p:sp>
         <p:nvSpPr>
@@ -4223,6 +4227,10 @@
             <a:prstDash val="solid"/>
           </a:ln>
         </p:spPr>
+        <p:txBody>
+          <a:bodyPr/>
+          <a:p/>
+        </p:txBody>
       </p:sp>
       <p:sp>
         <p:nvSpPr>
@@ -4296,7 +4304,7 @@
                 <a:ea typeface="Calibri" pitchFamily="34" charset="-122"/>
                 <a:cs typeface="Calibri" pitchFamily="34" charset="-120"/>
               </a:rPr>
-              <a:t>Start with the progress bars</a:t>
+              <a:t>Start with the status summary</a:t>
             </a:r>
             <a:endParaRPr lang="en-US" sz="1300" dirty="0"/>
           </a:p>
@@ -4335,7 +4343,7 @@
                 <a:ea typeface="Calibri" pitchFamily="34" charset="-122"/>
                 <a:cs typeface="Calibri" pitchFamily="34" charset="-120"/>
               </a:rPr>
-              <a:t>Each bar is one 2030 target: private vehicles, public transport and the government fleet. The bar shows how far along Jamaica is.</a:t>
+              <a:t>The doughnut chart counts how many of the 26 policy commitments fall into each status. It is the fastest way to see the overall picture.</a:t>
             </a:r>
             <a:endParaRPr lang="en-US" sz="1150" dirty="0"/>
           </a:p>
@@ -4365,6 +4373,10 @@
             <a:prstDash val="solid"/>
           </a:ln>
         </p:spPr>
+        <p:txBody>
+          <a:bodyPr/>
+          <a:p/>
+        </p:txBody>
       </p:sp>
       <p:sp>
         <p:nvSpPr>
@@ -4438,7 +4450,7 @@
                 <a:ea typeface="Calibri" pitchFamily="34" charset="-122"/>
                 <a:cs typeface="Calibri" pitchFamily="34" charset="-120"/>
               </a:rPr>
-              <a:t>Compare bar against target line</a:t>
+              <a:t>Read the colour key</a:t>
             </a:r>
             <a:endParaRPr lang="en-US" sz="1300" dirty="0"/>
           </a:p>
@@ -4477,7 +4489,7 @@
                 <a:ea typeface="Calibri" pitchFamily="34" charset="-122"/>
                 <a:cs typeface="Calibri" pitchFamily="34" charset="-120"/>
               </a:rPr>
-              <a:t>The target is marked on each bar. A short bar means the gap is still large.</a:t>
+              <a:t>Six statuses, from deep green for delivered through amber and orange to red, with grey for commitments where no public evidence was found either way.</a:t>
             </a:r>
             <a:endParaRPr lang="en-US" sz="1150" dirty="0"/>
           </a:p>
@@ -4507,6 +4519,10 @@
             <a:prstDash val="solid"/>
           </a:ln>
         </p:spPr>
+        <p:txBody>
+          <a:bodyPr/>
+          <a:p/>
+        </p:txBody>
       </p:sp>
       <p:sp>
         <p:nvSpPr>
@@ -4649,6 +4665,10 @@
             <a:prstDash val="solid"/>
           </a:ln>
         </p:spPr>
+        <p:txBody>
+          <a:bodyPr/>
+          <a:p/>
+        </p:txBody>
       </p:sp>
       <p:sp>
         <p:nvSpPr>
@@ -4791,6 +4811,10 @@
             <a:prstDash val="solid"/>
           </a:ln>
         </p:spPr>
+        <p:txBody>
+          <a:bodyPr/>
+          <a:p/>
+        </p:txBody>
       </p:sp>
       <p:sp>
         <p:nvSpPr>
@@ -4864,7 +4888,7 @@
                 <a:ea typeface="Calibri" pitchFamily="34" charset="-122"/>
                 <a:cs typeface="Calibri" pitchFamily="34" charset="-120"/>
               </a:rPr>
-              <a:t>Check the status summary</a:t>
+              <a:t>Finish with the policy gaps table</a:t>
             </a:r>
             <a:endParaRPr lang="en-US" sz="1300" dirty="0"/>
           </a:p>
@@ -4903,7 +4927,7 @@
                 <a:ea typeface="Calibri" pitchFamily="34" charset="-122"/>
                 <a:cs typeface="Calibri" pitchFamily="34" charset="-120"/>
               </a:rPr>
-              <a:t>The doughnut chart counts how many actions fall into each status.</a:t>
+              <a:t>Below the action table, 17 identified gaps grouped into four kinds: things nobody measures, standards never issued, work delivered by others rather than the state, and limits built into the policy's own design.</a:t>
             </a:r>
             <a:endParaRPr lang="en-US" sz="1150" dirty="0"/>
           </a:p>
@@ -4935,6 +4959,10 @@
             <a:prstDash val="dash"/>
           </a:ln>
         </p:spPr>
+        <p:txBody>
+          <a:bodyPr/>
+          <a:p/>
+        </p:txBody>
       </p:sp>
       <p:sp>
         <p:nvSpPr>
@@ -4962,6 +4990,10 @@
             <a:prstDash val="solid"/>
           </a:ln>
         </p:spPr>
+        <p:txBody>
+          <a:bodyPr/>
+          <a:p/>
+        </p:txBody>
       </p:sp>
       <p:sp>
         <p:nvSpPr>
@@ -5117,7 +5149,7 @@
                 <a:ea typeface="Calibri" pitchFamily="34" charset="-122"/>
                 <a:cs typeface="Calibri" pitchFamily="34" charset="-120"/>
               </a:rPr>
-              <a:t>The three progress bars with their target markers</a:t>
+              <a:t>The status summary doughnut and its colour key</a:t>
             </a:r>
             <a:endParaRPr lang="en-US" sz="1050" dirty="0"/>
           </a:p>
@@ -5372,6 +5404,10 @@
             <a:prstDash val="solid"/>
           </a:ln>
         </p:spPr>
+        <p:txBody>
+          <a:bodyPr/>
+          <a:p/>
+        </p:txBody>
       </p:sp>
       <p:sp>
         <p:nvSpPr>
@@ -5477,6 +5513,10 @@
             <a:prstDash val="solid"/>
           </a:ln>
         </p:spPr>
+        <p:txBody>
+          <a:bodyPr/>
+          <a:p/>
+        </p:txBody>
       </p:sp>
       <p:sp>
         <p:nvSpPr>
@@ -5582,6 +5622,10 @@
             <a:prstDash val="solid"/>
           </a:ln>
         </p:spPr>
+        <p:txBody>
+          <a:bodyPr/>
+          <a:p/>
+        </p:txBody>
       </p:sp>
       <p:sp>
         <p:nvSpPr>
@@ -5736,7 +5780,7 @@
                 <a:ea typeface="Calibri" pitchFamily="34" charset="-122"/>
                 <a:cs typeface="Calibri" pitchFamily="34" charset="-120"/>
               </a:rPr>
-              <a:t>Each row is one commitment from the policy document, coloured on a six-step scale from deep green for fully achieved, through blue, amber and orange, to red for worse than the starting point. Grey means no score is available yet.</a:t>
+              <a:t>Each row is one commitment from the policy document, coloured on a six-step scale from deep green for fully achieved, through blue, amber and orange, to red. Grey means no public evidence was found either way. The Notes column carries the evidence and is the widest column, because that is where the reasoning sits.</a:t>
             </a:r>
             <a:endParaRPr lang="en-US" sz="1250" dirty="0"/>
           </a:p>
@@ -5788,6 +5832,10 @@
             <a:prstDash val="dash"/>
           </a:ln>
         </p:spPr>
+        <p:txBody>
+          <a:bodyPr/>
+          <a:p/>
+        </p:txBody>
       </p:sp>
       <p:sp>
         <p:nvSpPr>
@@ -5815,6 +5863,10 @@
             <a:prstDash val="solid"/>
           </a:ln>
         </p:spPr>
+        <p:txBody>
+          <a:bodyPr/>
+          <a:p/>
+        </p:txBody>
       </p:sp>
       <p:sp>
         <p:nvSpPr>
@@ -6154,6 +6206,10 @@
             <a:prstDash val="solid"/>
           </a:ln>
         </p:spPr>
+        <p:txBody>
+          <a:bodyPr/>
+          <a:p/>
+        </p:txBody>
       </p:sp>
       <p:sp>
         <p:nvSpPr>
@@ -6516,6 +6572,10 @@
             <a:prstDash val="solid"/>
           </a:ln>
         </p:spPr>
+        <p:txBody>
+          <a:bodyPr/>
+          <a:p/>
+        </p:txBody>
       </p:sp>
       <p:sp>
         <p:nvSpPr>
@@ -6658,6 +6718,10 @@
             <a:prstDash val="solid"/>
           </a:ln>
         </p:spPr>
+        <p:txBody>
+          <a:bodyPr/>
+          <a:p/>
+        </p:txBody>
       </p:sp>
       <p:sp>
         <p:nvSpPr>
@@ -6800,6 +6864,10 @@
             <a:prstDash val="solid"/>
           </a:ln>
         </p:spPr>
+        <p:txBody>
+          <a:bodyPr/>
+          <a:p/>
+        </p:txBody>
       </p:sp>
       <p:sp>
         <p:nvSpPr>
@@ -6942,6 +7010,10 @@
             <a:prstDash val="solid"/>
           </a:ln>
         </p:spPr>
+        <p:txBody>
+          <a:bodyPr/>
+          <a:p/>
+        </p:txBody>
       </p:sp>
       <p:sp>
         <p:nvSpPr>
@@ -7084,6 +7156,10 @@
             <a:prstDash val="solid"/>
           </a:ln>
         </p:spPr>
+        <p:txBody>
+          <a:bodyPr/>
+          <a:p/>
+        </p:txBody>
       </p:sp>
       <p:sp>
         <p:nvSpPr>
@@ -7196,7 +7272,7 @@
                 <a:ea typeface="Calibri" pitchFamily="34" charset="-122"/>
                 <a:cs typeface="Calibri" pitchFamily="34" charset="-120"/>
               </a:rPr>
-              <a:t>Scroll to the bottom for the full detail on all 18 countries, 14 of them Caribbean, including import duty and a source link on every row.</a:t>
+              <a:t>Scroll to the bottom for the full detail on all 19 countries, 14 of them Caribbean, including import duty and a source link on every row.</a:t>
             </a:r>
             <a:endParaRPr lang="en-US" sz="1150" dirty="0"/>
           </a:p>
@@ -7228,6 +7304,10 @@
             <a:prstDash val="dash"/>
           </a:ln>
         </p:spPr>
+        <p:txBody>
+          <a:bodyPr/>
+          <a:p/>
+        </p:txBody>
       </p:sp>
       <p:sp>
         <p:nvSpPr>
@@ -7255,6 +7335,10 @@
             <a:prstDash val="solid"/>
           </a:ln>
         </p:spPr>
+        <p:txBody>
+          <a:bodyPr/>
+          <a:p/>
+        </p:txBody>
       </p:sp>
       <p:sp>
         <p:nvSpPr>
@@ -7725,6 +7809,10 @@
             <a:prstDash val="solid"/>
           </a:ln>
         </p:spPr>
+        <p:txBody>
+          <a:bodyPr/>
+          <a:p/>
+        </p:txBody>
       </p:sp>
       <p:sp>
         <p:nvSpPr>
@@ -7830,6 +7918,10 @@
             <a:prstDash val="solid"/>
           </a:ln>
         </p:spPr>
+        <p:txBody>
+          <a:bodyPr/>
+          <a:p/>
+        </p:txBody>
       </p:sp>
       <p:sp>
         <p:nvSpPr>
@@ -7903,7 +7995,7 @@
                 <a:ea typeface="Calibri" pitchFamily="34" charset="-122"/>
                 <a:cs typeface="Calibri" pitchFamily="34" charset="-120"/>
               </a:rPr>
-              <a:t>Some countries appear in the table but not on the charts. That is because they do not publish the figure that chart needs. A country missing from the scatter has no published EV sales share, not zero electric cars.</a:t>
+              <a:t>Some countries appear in the table but not on the charts, because they do not publish the figure that chart needs. A country missing from the scatter has no published EV sales share, not zero electric cars. Below the table, a data availability section lists every country by how complete its data is: 5 complete, 12 partial with the missing fields named, and 2 with nothing usable.</a:t>
             </a:r>
             <a:endParaRPr lang="en-US" sz="1050" dirty="0"/>
           </a:p>
@@ -7935,6 +8027,10 @@
             <a:prstDash val="dash"/>
           </a:ln>
         </p:spPr>
+        <p:txBody>
+          <a:bodyPr/>
+          <a:p/>
+        </p:txBody>
       </p:sp>
       <p:sp>
         <p:nvSpPr>
@@ -7962,6 +8058,10 @@
             <a:prstDash val="solid"/>
           </a:ln>
         </p:spPr>
+        <p:txBody>
+          <a:bodyPr/>
+          <a:p/>
+        </p:txBody>
       </p:sp>
       <p:sp>
         <p:nvSpPr>
@@ -8322,6 +8422,10 @@
             <a:prstDash val="solid"/>
           </a:ln>
         </p:spPr>
+        <p:txBody>
+          <a:bodyPr/>
+          <a:p/>
+        </p:txBody>
       </p:sp>
       <p:sp>
         <p:nvSpPr>
@@ -8645,6 +8749,10 @@
             <a:prstDash val="solid"/>
           </a:ln>
         </p:spPr>
+        <p:txBody>
+          <a:bodyPr/>
+          <a:p/>
+        </p:txBody>
       </p:sp>
       <p:sp>
         <p:nvSpPr>
@@ -8787,6 +8895,10 @@
             <a:prstDash val="solid"/>
           </a:ln>
         </p:spPr>
+        <p:txBody>
+          <a:bodyPr/>
+          <a:p/>
+        </p:txBody>
       </p:sp>
       <p:sp>
         <p:nvSpPr>
@@ -8899,7 +9011,7 @@
                 <a:ea typeface="Calibri" pitchFamily="34" charset="-122"/>
                 <a:cs typeface="Calibri" pitchFamily="34" charset="-120"/>
               </a:rPr>
-              <a:t>Use the first 'Select model' dropdown. The list covers the models most commonly sold and imported in Jamaica.</a:t>
+              <a:t>Use the first 'Select model' dropdown. The list covers the models most commonly sold and imported in Jamaica, and ends with 'My Car' if yours is not there.</a:t>
             </a:r>
             <a:endParaRPr lang="en-US" sz="1150" dirty="0"/>
           </a:p>
@@ -8929,6 +9041,10 @@
             <a:prstDash val="solid"/>
           </a:ln>
         </p:spPr>
+        <p:txBody>
+          <a:bodyPr/>
+          <a:p/>
+        </p:txBody>
       </p:sp>
       <p:sp>
         <p:nvSpPr>
@@ -9041,7 +9157,7 @@
                 <a:ea typeface="Calibri" pitchFamily="34" charset="-122"/>
                 <a:cs typeface="Calibri" pitchFamily="34" charset="-120"/>
               </a:rPr>
-              <a:t>Choosing a model fills in a purchase price automatically. Type over it if you have a real quote.</a:t>
+              <a:t>Choosing a model fills in a purchase price automatically. Type over it if you have a real quote. If you picked 'My Car', a panel opens where you enter price, consumption, maintenance, model year and depreciation yourself.</a:t>
             </a:r>
             <a:endParaRPr lang="en-US" sz="1150" dirty="0"/>
           </a:p>
@@ -9071,6 +9187,10 @@
             <a:prstDash val="solid"/>
           </a:ln>
         </p:spPr>
+        <p:txBody>
+          <a:bodyPr/>
+          <a:p/>
+        </p:txBody>
       </p:sp>
       <p:sp>
         <p:nvSpPr>
@@ -9213,6 +9333,10 @@
             <a:prstDash val="solid"/>
           </a:ln>
         </p:spPr>
+        <p:txBody>
+          <a:bodyPr/>
+          <a:p/>
+        </p:txBody>
       </p:sp>
       <p:sp>
         <p:nvSpPr>
@@ -9325,7 +9449,7 @@
                 <a:ea typeface="Calibri" pitchFamily="34" charset="-122"/>
                 <a:cs typeface="Calibri" pitchFamily="34" charset="-120"/>
               </a:rPr>
-              <a:t>Use the second 'Select model' dropdown, below the petrol one.</a:t>
+              <a:t>Use the second 'Select model' dropdown, below the petrol one. 'My Car' is available here too, with a box for battery size and where the battery was made.</a:t>
             </a:r>
             <a:endParaRPr lang="en-US" sz="1150" dirty="0"/>
           </a:p>
@@ -9355,6 +9479,10 @@
             <a:prstDash val="solid"/>
           </a:ln>
         </p:spPr>
+        <p:txBody>
+          <a:bodyPr/>
+          <a:p/>
+        </p:txBody>
       </p:sp>
       <p:sp>
         <p:nvSpPr>
@@ -9499,6 +9627,10 @@
             <a:prstDash val="dash"/>
           </a:ln>
         </p:spPr>
+        <p:txBody>
+          <a:bodyPr/>
+          <a:p/>
+        </p:txBody>
       </p:sp>
       <p:sp>
         <p:nvSpPr>
@@ -9526,6 +9658,10 @@
             <a:prstDash val="solid"/>
           </a:ln>
         </p:spPr>
+        <p:txBody>
+          <a:bodyPr/>
+          <a:p/>
+        </p:txBody>
       </p:sp>
       <p:sp>
         <p:nvSpPr>
@@ -9744,7 +9880,7 @@
                 <a:ea typeface="Calibri" pitchFamily="34" charset="-122"/>
                 <a:cs typeface="Calibri" pitchFamily="34" charset="-120"/>
               </a:rPr>
-              <a:t>The electric model dropdown below</a:t>
+              <a:t>The electric model dropdown below | The 'My Car' panel, if you chose that option</a:t>
             </a:r>
             <a:endParaRPr lang="en-US" sz="1050" dirty="0"/>
           </a:p>
@@ -9955,6 +10091,10 @@
             <a:prstDash val="solid"/>
           </a:ln>
         </p:spPr>
+        <p:txBody>
+          <a:bodyPr/>
+          <a:p/>
+        </p:txBody>
       </p:sp>
       <p:sp>
         <p:nvSpPr>
@@ -10097,6 +10237,10 @@
             <a:prstDash val="solid"/>
           </a:ln>
         </p:spPr>
+        <p:txBody>
+          <a:bodyPr/>
+          <a:p/>
+        </p:txBody>
       </p:sp>
       <p:sp>
         <p:nvSpPr>
@@ -10239,6 +10383,10 @@
             <a:prstDash val="solid"/>
           </a:ln>
         </p:spPr>
+        <p:txBody>
+          <a:bodyPr/>
+          <a:p/>
+        </p:txBody>
       </p:sp>
       <p:sp>
         <p:nvSpPr>
@@ -10381,6 +10529,10 @@
             <a:prstDash val="solid"/>
           </a:ln>
         </p:spPr>
+        <p:txBody>
+          <a:bodyPr/>
+          <a:p/>
+        </p:txBody>
       </p:sp>
       <p:sp>
         <p:nvSpPr>
@@ -10523,6 +10675,10 @@
             <a:prstDash val="solid"/>
           </a:ln>
         </p:spPr>
+        <p:txBody>
+          <a:bodyPr/>
+          <a:p/>
+        </p:txBody>
       </p:sp>
       <p:sp>
         <p:nvSpPr>
@@ -10667,6 +10823,10 @@
             <a:prstDash val="dash"/>
           </a:ln>
         </p:spPr>
+        <p:txBody>
+          <a:bodyPr/>
+          <a:p/>
+        </p:txBody>
       </p:sp>
       <p:sp>
         <p:nvSpPr>
@@ -10694,6 +10854,10 @@
             <a:prstDash val="solid"/>
           </a:ln>
         </p:spPr>
+        <p:txBody>
+          <a:bodyPr/>
+          <a:p/>
+        </p:txBody>
       </p:sp>
       <p:sp>
         <p:nvSpPr>
@@ -10944,6 +11108,10 @@
             <a:prstDash val="solid"/>
           </a:ln>
         </p:spPr>
+        <p:txBody>
+          <a:bodyPr/>
+          <a:p/>
+        </p:txBody>
       </p:sp>
       <p:sp>
         <p:nvSpPr>
@@ -10969,6 +11137,10 @@
             <a:prstDash val="solid"/>
           </a:ln>
         </p:spPr>
+        <p:txBody>
+          <a:bodyPr/>
+          <a:p/>
+        </p:txBody>
       </p:sp>
       <p:sp>
         <p:nvSpPr>
@@ -11308,6 +11480,10 @@
             <a:prstDash val="solid"/>
           </a:ln>
         </p:spPr>
+        <p:txBody>
+          <a:bodyPr/>
+          <a:p/>
+        </p:txBody>
       </p:sp>
       <p:sp>
         <p:nvSpPr>
@@ -11381,7 +11557,7 @@
                 <a:ea typeface="Calibri" pitchFamily="34" charset="-122"/>
                 <a:cs typeface="Calibri" pitchFamily="34" charset="-120"/>
               </a:rPr>
-              <a:t>Quick totals across the top: what each vehicle costs to run, and the difference between them.</a:t>
+              <a:t>Quick totals across the top. Note that 'Annual running-cost saving' is fuel against electricity only. It does not include maintenance, depreciation or financing, which is why it differs from the chart below.</a:t>
             </a:r>
             <a:endParaRPr lang="en-US" sz="1050" dirty="0"/>
           </a:p>
@@ -11413,6 +11589,10 @@
             <a:prstDash val="solid"/>
           </a:ln>
         </p:spPr>
+        <p:txBody>
+          <a:bodyPr/>
+          <a:p/>
+        </p:txBody>
       </p:sp>
       <p:sp>
         <p:nvSpPr>
@@ -11518,6 +11698,10 @@
             <a:prstDash val="solid"/>
           </a:ln>
         </p:spPr>
+        <p:txBody>
+          <a:bodyPr/>
+          <a:p/>
+        </p:txBody>
       </p:sp>
       <p:sp>
         <p:nvSpPr>
@@ -11747,6 +11931,10 @@
             <a:prstDash val="dash"/>
           </a:ln>
         </p:spPr>
+        <p:txBody>
+          <a:bodyPr/>
+          <a:p/>
+        </p:txBody>
       </p:sp>
       <p:sp>
         <p:nvSpPr>
@@ -11774,6 +11962,10 @@
             <a:prstDash val="solid"/>
           </a:ln>
         </p:spPr>
+        <p:txBody>
+          <a:bodyPr/>
+          <a:p/>
+        </p:txBody>
       </p:sp>
       <p:sp>
         <p:nvSpPr>
@@ -12113,6 +12305,10 @@
             <a:prstDash val="solid"/>
           </a:ln>
         </p:spPr>
+        <p:txBody>
+          <a:bodyPr/>
+          <a:p/>
+        </p:txBody>
       </p:sp>
       <p:sp>
         <p:nvSpPr>
@@ -12438,6 +12634,10 @@
             <a:prstDash val="solid"/>
           </a:ln>
         </p:spPr>
+        <p:txBody>
+          <a:bodyPr/>
+          <a:p/>
+        </p:txBody>
       </p:sp>
       <p:sp>
         <p:nvSpPr>
@@ -12543,6 +12743,10 @@
             <a:prstDash val="solid"/>
           </a:ln>
         </p:spPr>
+        <p:txBody>
+          <a:bodyPr/>
+          <a:p/>
+        </p:txBody>
       </p:sp>
       <p:sp>
         <p:nvSpPr>
@@ -12648,6 +12852,10 @@
             <a:prstDash val="solid"/>
           </a:ln>
         </p:spPr>
+        <p:txBody>
+          <a:bodyPr/>
+          <a:p/>
+        </p:txBody>
       </p:sp>
       <p:sp>
         <p:nvSpPr>
@@ -12790,6 +12998,10 @@
             <a:prstDash val="solid"/>
           </a:ln>
         </p:spPr>
+        <p:txBody>
+          <a:bodyPr/>
+          <a:p/>
+        </p:txBody>
       </p:sp>
       <p:sp>
         <p:nvSpPr>
@@ -12907,6 +13119,10 @@
             <a:prstDash val="solid"/>
           </a:ln>
         </p:spPr>
+        <p:txBody>
+          <a:bodyPr/>
+          <a:p/>
+        </p:txBody>
       </p:sp>
       <p:sp>
         <p:nvSpPr>
@@ -13024,6 +13240,10 @@
             <a:prstDash val="solid"/>
           </a:ln>
         </p:spPr>
+        <p:txBody>
+          <a:bodyPr/>
+          <a:p/>
+        </p:txBody>
       </p:sp>
       <p:sp>
         <p:nvSpPr>
@@ -13141,6 +13361,10 @@
             <a:prstDash val="solid"/>
           </a:ln>
         </p:spPr>
+        <p:txBody>
+          <a:bodyPr/>
+          <a:p/>
+        </p:txBody>
       </p:sp>
       <p:sp>
         <p:nvSpPr>
@@ -13258,6 +13482,10 @@
             <a:prstDash val="solid"/>
           </a:ln>
         </p:spPr>
+        <p:txBody>
+          <a:bodyPr/>
+          <a:p/>
+        </p:txBody>
       </p:sp>
       <p:sp>
         <p:nvSpPr>
@@ -13375,6 +13603,10 @@
             <a:prstDash val="solid"/>
           </a:ln>
         </p:spPr>
+        <p:txBody>
+          <a:bodyPr/>
+          <a:p/>
+        </p:txBody>
       </p:sp>
       <p:sp>
         <p:nvSpPr>
@@ -13492,6 +13724,10 @@
             <a:prstDash val="solid"/>
           </a:ln>
         </p:spPr>
+        <p:txBody>
+          <a:bodyPr/>
+          <a:p/>
+        </p:txBody>
       </p:sp>
       <p:sp>
         <p:nvSpPr>
@@ -13609,6 +13845,10 @@
             <a:prstDash val="solid"/>
           </a:ln>
         </p:spPr>
+        <p:txBody>
+          <a:bodyPr/>
+          <a:p/>
+        </p:txBody>
       </p:sp>
       <p:sp>
         <p:nvSpPr>
@@ -13907,6 +14147,10 @@
             <a:prstDash val="solid"/>
           </a:ln>
         </p:spPr>
+        <p:txBody>
+          <a:bodyPr/>
+          <a:p/>
+        </p:txBody>
       </p:sp>
       <p:sp>
         <p:nvSpPr>
@@ -14049,6 +14293,10 @@
             <a:prstDash val="solid"/>
           </a:ln>
         </p:spPr>
+        <p:txBody>
+          <a:bodyPr/>
+          <a:p/>
+        </p:txBody>
       </p:sp>
       <p:sp>
         <p:nvSpPr>
@@ -14191,6 +14439,10 @@
             <a:prstDash val="solid"/>
           </a:ln>
         </p:spPr>
+        <p:txBody>
+          <a:bodyPr/>
+          <a:p/>
+        </p:txBody>
       </p:sp>
       <p:sp>
         <p:nvSpPr>
@@ -14333,6 +14585,10 @@
             <a:prstDash val="solid"/>
           </a:ln>
         </p:spPr>
+        <p:txBody>
+          <a:bodyPr/>
+          <a:p/>
+        </p:txBody>
       </p:sp>
       <p:sp>
         <p:nvSpPr>
@@ -14475,6 +14731,10 @@
             <a:prstDash val="solid"/>
           </a:ln>
         </p:spPr>
+        <p:txBody>
+          <a:bodyPr/>
+          <a:p/>
+        </p:txBody>
       </p:sp>
       <p:sp>
         <p:nvSpPr>
@@ -14619,6 +14879,10 @@
             <a:prstDash val="dash"/>
           </a:ln>
         </p:spPr>
+        <p:txBody>
+          <a:bodyPr/>
+          <a:p/>
+        </p:txBody>
       </p:sp>
       <p:sp>
         <p:nvSpPr>
@@ -14646,6 +14910,10 @@
             <a:prstDash val="solid"/>
           </a:ln>
         </p:spPr>
+        <p:txBody>
+          <a:bodyPr/>
+          <a:p/>
+        </p:txBody>
       </p:sp>
       <p:sp>
         <p:nvSpPr>
@@ -14875,6 +15143,10 @@
             <a:prstDash val="solid"/>
           </a:ln>
         </p:spPr>
+        <p:txBody>
+          <a:bodyPr/>
+          <a:p/>
+        </p:txBody>
       </p:sp>
       <p:sp>
         <p:nvSpPr>
@@ -14900,6 +15172,10 @@
             <a:prstDash val="solid"/>
           </a:ln>
         </p:spPr>
+        <p:txBody>
+          <a:bodyPr/>
+          <a:p/>
+        </p:txBody>
       </p:sp>
       <p:sp>
         <p:nvSpPr>
@@ -15198,6 +15474,10 @@
             <a:prstDash val="solid"/>
           </a:ln>
         </p:spPr>
+        <p:txBody>
+          <a:bodyPr/>
+          <a:p/>
+        </p:txBody>
       </p:sp>
       <p:sp>
         <p:nvSpPr>
@@ -15340,6 +15620,10 @@
             <a:prstDash val="solid"/>
           </a:ln>
         </p:spPr>
+        <p:txBody>
+          <a:bodyPr/>
+          <a:p/>
+        </p:txBody>
       </p:sp>
       <p:sp>
         <p:nvSpPr>
@@ -15482,6 +15766,10 @@
             <a:prstDash val="solid"/>
           </a:ln>
         </p:spPr>
+        <p:txBody>
+          <a:bodyPr/>
+          <a:p/>
+        </p:txBody>
       </p:sp>
       <p:sp>
         <p:nvSpPr>
@@ -15594,7 +15882,7 @@
                 <a:ea typeface="Calibri" pitchFamily="34" charset="-122"/>
                 <a:cs typeface="Calibri" pitchFamily="34" charset="-120"/>
               </a:rPr>
-              <a:t>Eight options: charging at home, the public network you picked in Global settings, JPS overnight, daytime or evening peak, a fleet base, a mixture, or your own price. This choice moves the result more than any other.</a:t>
+              <a:t>Charging at home, the public network you picked in Global settings, JPS overnight, daytime or evening peak, or your own custom rate. This choice moves the result more than any other: the gap between best and worst is about J$4.5 million over five years.</a:t>
             </a:r>
             <a:endParaRPr lang="en-US" sz="1150" dirty="0"/>
           </a:p>
@@ -15624,6 +15912,10 @@
             <a:prstDash val="solid"/>
           </a:ln>
         </p:spPr>
+        <p:txBody>
+          <a:bodyPr/>
+          <a:p/>
+        </p:txBody>
       </p:sp>
       <p:sp>
         <p:nvSpPr>
@@ -15766,6 +16058,10 @@
             <a:prstDash val="solid"/>
           </a:ln>
         </p:spPr>
+        <p:txBody>
+          <a:bodyPr/>
+          <a:p/>
+        </p:txBody>
       </p:sp>
       <p:sp>
         <p:nvSpPr>
@@ -15910,6 +16206,10 @@
             <a:prstDash val="dash"/>
           </a:ln>
         </p:spPr>
+        <p:txBody>
+          <a:bodyPr/>
+          <a:p/>
+        </p:txBody>
       </p:sp>
       <p:sp>
         <p:nvSpPr>
@@ -15937,6 +16237,10 @@
             <a:prstDash val="solid"/>
           </a:ln>
         </p:spPr>
+        <p:txBody>
+          <a:bodyPr/>
+          <a:p/>
+        </p:txBody>
       </p:sp>
       <p:sp>
         <p:nvSpPr>
@@ -16113,7 +16417,7 @@
                 <a:ea typeface="Calibri" pitchFamily="34" charset="-122"/>
                 <a:cs typeface="Calibri" pitchFamily="34" charset="-120"/>
               </a:rPr>
-              <a:t>The four charging options</a:t>
+              <a:t>The charging options, and the custom rate box</a:t>
             </a:r>
             <a:endParaRPr lang="en-US" sz="1050" dirty="0"/>
           </a:p>
@@ -16347,6 +16651,10 @@
             <a:prstDash val="solid"/>
           </a:ln>
         </p:spPr>
+        <p:txBody>
+          <a:bodyPr/>
+          <a:p/>
+        </p:txBody>
       </p:sp>
       <p:sp>
         <p:nvSpPr>
@@ -16420,7 +16728,7 @@
                 <a:ea typeface="Calibri" pitchFamily="34" charset="-122"/>
                 <a:cs typeface="Calibri" pitchFamily="34" charset="-120"/>
               </a:rPr>
-              <a:t>One block per vehicle: purchase price, monthly loan payment, energy cost per kilometre, and what is left over each year.</a:t>
+              <a:t>One block per vehicle: purchase price, monthly loan payment, energy cost per kilometre, what is left over each year, and the resale value at the end of your horizon less any loan still owed.</a:t>
             </a:r>
             <a:endParaRPr lang="en-US" sz="1050" dirty="0"/>
           </a:p>
@@ -16452,6 +16760,10 @@
             <a:prstDash val="solid"/>
           </a:ln>
         </p:spPr>
+        <p:txBody>
+          <a:bodyPr/>
+          <a:p/>
+        </p:txBody>
       </p:sp>
       <p:sp>
         <p:nvSpPr>
@@ -16525,7 +16837,7 @@
                 <a:ea typeface="Calibri" pitchFamily="34" charset="-122"/>
                 <a:cs typeface="Calibri" pitchFamily="34" charset="-120"/>
               </a:rPr>
-              <a:t>Money accumulated over time for each vehicle. Lines start below zero because of the deposit.</a:t>
+              <a:t>Money accumulated over time for each vehicle. Lines start below zero because of the deposit, and the final year includes selling the vehicle. Counting resale matters: the more expensive the vehicle, the more value was previously being ignored, which worked against the electric options.</a:t>
             </a:r>
             <a:endParaRPr lang="en-US" sz="1050" dirty="0"/>
           </a:p>
@@ -16557,6 +16869,10 @@
             <a:prstDash val="solid"/>
           </a:ln>
         </p:spPr>
+        <p:txBody>
+          <a:bodyPr/>
+          <a:p/>
+        </p:txBody>
       </p:sp>
       <p:sp>
         <p:nvSpPr>
@@ -16786,6 +17102,10 @@
             <a:prstDash val="dash"/>
           </a:ln>
         </p:spPr>
+        <p:txBody>
+          <a:bodyPr/>
+          <a:p/>
+        </p:txBody>
       </p:sp>
       <p:sp>
         <p:nvSpPr>
@@ -16813,6 +17133,10 @@
             <a:prstDash val="solid"/>
           </a:ln>
         </p:spPr>
+        <p:txBody>
+          <a:bodyPr/>
+          <a:p/>
+        </p:txBody>
       </p:sp>
       <p:sp>
         <p:nvSpPr>
@@ -17152,6 +17476,10 @@
             <a:prstDash val="dash"/>
           </a:ln>
         </p:spPr>
+        <p:txBody>
+          <a:bodyPr/>
+          <a:p/>
+        </p:txBody>
       </p:sp>
       <p:sp>
         <p:nvSpPr>
@@ -17296,6 +17624,10 @@
             <a:prstDash val="solid"/>
           </a:ln>
         </p:spPr>
+        <p:txBody>
+          <a:bodyPr/>
+          <a:p/>
+        </p:txBody>
       </p:sp>
       <p:sp>
         <p:nvSpPr>
@@ -17465,6 +17797,10 @@
             <a:prstDash val="solid"/>
           </a:ln>
         </p:spPr>
+        <p:txBody>
+          <a:bodyPr/>
+          <a:p/>
+        </p:txBody>
       </p:sp>
       <p:sp>
         <p:nvSpPr>
@@ -17829,6 +18165,10 @@
             <a:prstDash val="solid"/>
           </a:ln>
         </p:spPr>
+        <p:txBody>
+          <a:bodyPr/>
+          <a:p/>
+        </p:txBody>
       </p:sp>
       <p:sp>
         <p:nvSpPr>
@@ -17934,6 +18274,10 @@
             <a:prstDash val="solid"/>
           </a:ln>
         </p:spPr>
+        <p:txBody>
+          <a:bodyPr/>
+          <a:p/>
+        </p:txBody>
       </p:sp>
       <p:sp>
         <p:nvSpPr>
@@ -18039,6 +18383,10 @@
             <a:prstDash val="solid"/>
           </a:ln>
         </p:spPr>
+        <p:txBody>
+          <a:bodyPr/>
+          <a:p/>
+        </p:txBody>
       </p:sp>
       <p:sp>
         <p:nvSpPr>
@@ -18142,6 +18490,10 @@
             <a:prstDash val="solid"/>
           </a:ln>
         </p:spPr>
+        <p:txBody>
+          <a:bodyPr/>
+          <a:p/>
+        </p:txBody>
       </p:sp>
       <p:sp>
         <p:nvSpPr>
@@ -18284,6 +18636,10 @@
             <a:prstDash val="solid"/>
           </a:ln>
         </p:spPr>
+        <p:txBody>
+          <a:bodyPr/>
+          <a:p/>
+        </p:txBody>
       </p:sp>
       <p:sp>
         <p:nvSpPr>
@@ -18426,6 +18782,10 @@
             <a:prstDash val="solid"/>
           </a:ln>
         </p:spPr>
+        <p:txBody>
+          <a:bodyPr/>
+          <a:p/>
+        </p:txBody>
       </p:sp>
       <p:sp>
         <p:nvSpPr>
@@ -18570,6 +18930,10 @@
             <a:prstDash val="dash"/>
           </a:ln>
         </p:spPr>
+        <p:txBody>
+          <a:bodyPr/>
+          <a:p/>
+        </p:txBody>
       </p:sp>
       <p:sp>
         <p:nvSpPr>
@@ -18597,6 +18961,10 @@
             <a:prstDash val="solid"/>
           </a:ln>
         </p:spPr>
+        <p:txBody>
+          <a:bodyPr/>
+          <a:p/>
+        </p:txBody>
       </p:sp>
       <p:sp>
         <p:nvSpPr>
@@ -19005,6 +19373,10 @@
             <a:prstDash val="solid"/>
           </a:ln>
         </p:spPr>
+        <p:txBody>
+          <a:bodyPr/>
+          <a:p/>
+        </p:txBody>
       </p:sp>
       <p:sp>
         <p:nvSpPr>
@@ -19147,6 +19519,10 @@
             <a:prstDash val="solid"/>
           </a:ln>
         </p:spPr>
+        <p:txBody>
+          <a:bodyPr/>
+          <a:p/>
+        </p:txBody>
       </p:sp>
       <p:sp>
         <p:nvSpPr>
@@ -19220,7 +19596,7 @@
                 <a:ea typeface="Calibri" pitchFamily="34" charset="-122"/>
                 <a:cs typeface="Calibri" pitchFamily="34" charset="-120"/>
               </a:rPr>
-              <a:t>Choose a grid scenario</a:t>
+              <a:t>Set the renewable share</a:t>
             </a:r>
             <a:endParaRPr lang="en-US" sz="1300" dirty="0"/>
           </a:p>
@@ -19289,6 +19665,10 @@
             <a:prstDash val="solid"/>
           </a:ln>
         </p:spPr>
+        <p:txBody>
+          <a:bodyPr/>
+          <a:p/>
+        </p:txBody>
       </p:sp>
       <p:sp>
         <p:nvSpPr>
@@ -19431,6 +19811,10 @@
             <a:prstDash val="solid"/>
           </a:ln>
         </p:spPr>
+        <p:txBody>
+          <a:bodyPr/>
+          <a:p/>
+        </p:txBody>
       </p:sp>
       <p:sp>
         <p:nvSpPr>
@@ -19573,6 +19957,10 @@
             <a:prstDash val="solid"/>
           </a:ln>
         </p:spPr>
+        <p:txBody>
+          <a:bodyPr/>
+          <a:p/>
+        </p:txBody>
       </p:sp>
       <p:sp>
         <p:nvSpPr>
@@ -19717,6 +20105,10 @@
             <a:prstDash val="dash"/>
           </a:ln>
         </p:spPr>
+        <p:txBody>
+          <a:bodyPr/>
+          <a:p/>
+        </p:txBody>
       </p:sp>
       <p:sp>
         <p:nvSpPr>
@@ -19744,6 +20136,10 @@
             <a:prstDash val="solid"/>
           </a:ln>
         </p:spPr>
+        <p:txBody>
+          <a:bodyPr/>
+          <a:p/>
+        </p:txBody>
       </p:sp>
       <p:sp>
         <p:nvSpPr>
@@ -19920,7 +20316,7 @@
                 <a:ea typeface="Calibri" pitchFamily="34" charset="-122"/>
                 <a:cs typeface="Calibri" pitchFamily="34" charset="-120"/>
               </a:rPr>
-              <a:t>The grid scenario dropdown</a:t>
+              <a:t>The renewable share slider and the note underneath it</a:t>
             </a:r>
             <a:endParaRPr lang="en-US" sz="1050" dirty="0"/>
           </a:p>
@@ -20212,6 +20608,10 @@
             <a:prstDash val="solid"/>
           </a:ln>
         </p:spPr>
+        <p:txBody>
+          <a:bodyPr/>
+          <a:p/>
+        </p:txBody>
       </p:sp>
       <p:sp>
         <p:nvSpPr>
@@ -20354,6 +20754,10 @@
             <a:prstDash val="solid"/>
           </a:ln>
         </p:spPr>
+        <p:txBody>
+          <a:bodyPr/>
+          <a:p/>
+        </p:txBody>
       </p:sp>
       <p:sp>
         <p:nvSpPr>
@@ -20496,6 +20900,10 @@
             <a:prstDash val="solid"/>
           </a:ln>
         </p:spPr>
+        <p:txBody>
+          <a:bodyPr/>
+          <a:p/>
+        </p:txBody>
       </p:sp>
       <p:sp>
         <p:nvSpPr>
@@ -20638,6 +21046,10 @@
             <a:prstDash val="solid"/>
           </a:ln>
         </p:spPr>
+        <p:txBody>
+          <a:bodyPr/>
+          <a:p/>
+        </p:txBody>
       </p:sp>
       <p:sp>
         <p:nvSpPr>
@@ -20782,6 +21194,10 @@
             <a:prstDash val="dash"/>
           </a:ln>
         </p:spPr>
+        <p:txBody>
+          <a:bodyPr/>
+          <a:p/>
+        </p:txBody>
       </p:sp>
       <p:sp>
         <p:nvSpPr>
@@ -20809,6 +21225,10 @@
             <a:prstDash val="solid"/>
           </a:ln>
         </p:spPr>
+        <p:txBody>
+          <a:bodyPr/>
+          <a:p/>
+        </p:txBody>
       </p:sp>
       <p:sp>
         <p:nvSpPr>
@@ -21059,6 +21479,10 @@
             <a:prstDash val="solid"/>
           </a:ln>
         </p:spPr>
+        <p:txBody>
+          <a:bodyPr/>
+          <a:p/>
+        </p:txBody>
       </p:sp>
       <p:sp>
         <p:nvSpPr>
@@ -21084,6 +21508,10 @@
             <a:prstDash val="solid"/>
           </a:ln>
         </p:spPr>
+        <p:txBody>
+          <a:bodyPr/>
+          <a:p/>
+        </p:txBody>
       </p:sp>
       <p:sp>
         <p:nvSpPr>
@@ -21313,6 +21741,10 @@
             <a:prstDash val="solid"/>
           </a:ln>
         </p:spPr>
+        <p:txBody>
+          <a:bodyPr/>
+          <a:p/>
+        </p:txBody>
       </p:sp>
       <p:sp>
         <p:nvSpPr>
@@ -21636,6 +22068,10 @@
             <a:prstDash val="solid"/>
           </a:ln>
         </p:spPr>
+        <p:txBody>
+          <a:bodyPr/>
+          <a:p/>
+        </p:txBody>
       </p:sp>
       <p:sp>
         <p:nvSpPr>
@@ -21778,6 +22214,10 @@
             <a:prstDash val="solid"/>
           </a:ln>
         </p:spPr>
+        <p:txBody>
+          <a:bodyPr/>
+          <a:p/>
+        </p:txBody>
       </p:sp>
       <p:sp>
         <p:nvSpPr>
@@ -21920,6 +22360,10 @@
             <a:prstDash val="solid"/>
           </a:ln>
         </p:spPr>
+        <p:txBody>
+          <a:bodyPr/>
+          <a:p/>
+        </p:txBody>
       </p:sp>
       <p:sp>
         <p:nvSpPr>
@@ -22062,6 +22506,10 @@
             <a:prstDash val="solid"/>
           </a:ln>
         </p:spPr>
+        <p:txBody>
+          <a:bodyPr/>
+          <a:p/>
+        </p:txBody>
       </p:sp>
       <p:sp>
         <p:nvSpPr>
@@ -22204,6 +22652,10 @@
             <a:prstDash val="solid"/>
           </a:ln>
         </p:spPr>
+        <p:txBody>
+          <a:bodyPr/>
+          <a:p/>
+        </p:txBody>
       </p:sp>
       <p:sp>
         <p:nvSpPr>
@@ -22346,6 +22798,10 @@
             <a:prstDash val="solid"/>
           </a:ln>
         </p:spPr>
+        <p:txBody>
+          <a:bodyPr/>
+          <a:p/>
+        </p:txBody>
       </p:sp>
       <p:sp>
         <p:nvSpPr>
@@ -22419,7 +22875,7 @@
                 <a:ea typeface="Calibri" pitchFamily="34" charset="-122"/>
                 <a:cs typeface="Calibri" pitchFamily="34" charset="-120"/>
               </a:rPr>
-              <a:t>Choose a grid scenario</a:t>
+              <a:t>Set the renewable share</a:t>
             </a:r>
             <a:endParaRPr lang="en-US" sz="1300" dirty="0"/>
           </a:p>
@@ -22458,7 +22914,7 @@
                 <a:ea typeface="Calibri" pitchFamily="34" charset="-122"/>
                 <a:cs typeface="Calibri" pitchFamily="34" charset="-120"/>
               </a:rPr>
-              <a:t>Electricity today, or the cleaner supply projected for later years. An EV gets cleaner as the grid does.</a:t>
+              <a:t>Drag the slider between 0 and 100 per cent renewable. It is marked at Jamaica's 2022 mix and the 2026 and 2030 plan projections, and you can set any value between or beyond them. An EV gets cleaner as the grid does.</a:t>
             </a:r>
             <a:endParaRPr lang="en-US" sz="1150" dirty="0"/>
           </a:p>
@@ -22490,6 +22946,10 @@
             <a:prstDash val="dash"/>
           </a:ln>
         </p:spPr>
+        <p:txBody>
+          <a:bodyPr/>
+          <a:p/>
+        </p:txBody>
       </p:sp>
       <p:sp>
         <p:nvSpPr>
@@ -22517,6 +22977,10 @@
             <a:prstDash val="solid"/>
           </a:ln>
         </p:spPr>
+        <p:txBody>
+          <a:bodyPr/>
+          <a:p/>
+        </p:txBody>
       </p:sp>
       <p:sp>
         <p:nvSpPr>
@@ -22735,7 +23199,7 @@
                 <a:ea typeface="Calibri" pitchFamily="34" charset="-122"/>
                 <a:cs typeface="Calibri" pitchFamily="34" charset="-120"/>
               </a:rPr>
-              <a:t>The grid scenario dropdown</a:t>
+              <a:t>The renewable share slider and the note underneath it</a:t>
             </a:r>
             <a:endParaRPr lang="en-US" sz="1050" dirty="0"/>
           </a:p>
@@ -22946,6 +23410,10 @@
             <a:prstDash val="solid"/>
           </a:ln>
         </p:spPr>
+        <p:txBody>
+          <a:bodyPr/>
+          <a:p/>
+        </p:txBody>
       </p:sp>
       <p:sp>
         <p:nvSpPr>
@@ -23088,6 +23556,10 @@
             <a:prstDash val="solid"/>
           </a:ln>
         </p:spPr>
+        <p:txBody>
+          <a:bodyPr/>
+          <a:p/>
+        </p:txBody>
       </p:sp>
       <p:sp>
         <p:nvSpPr>
@@ -23230,6 +23702,10 @@
             <a:prstDash val="solid"/>
           </a:ln>
         </p:spPr>
+        <p:txBody>
+          <a:bodyPr/>
+          <a:p/>
+        </p:txBody>
       </p:sp>
       <p:sp>
         <p:nvSpPr>
@@ -23372,6 +23848,10 @@
             <a:prstDash val="solid"/>
           </a:ln>
         </p:spPr>
+        <p:txBody>
+          <a:bodyPr/>
+          <a:p/>
+        </p:txBody>
       </p:sp>
       <p:sp>
         <p:nvSpPr>
@@ -23514,6 +23994,10 @@
             <a:prstDash val="solid"/>
           </a:ln>
         </p:spPr>
+        <p:txBody>
+          <a:bodyPr/>
+          <a:p/>
+        </p:txBody>
       </p:sp>
       <p:sp>
         <p:nvSpPr>
@@ -23658,6 +24142,10 @@
             <a:prstDash val="dash"/>
           </a:ln>
         </p:spPr>
+        <p:txBody>
+          <a:bodyPr/>
+          <a:p/>
+        </p:txBody>
       </p:sp>
       <p:sp>
         <p:nvSpPr>
@@ -23685,6 +24173,10 @@
             <a:prstDash val="solid"/>
           </a:ln>
         </p:spPr>
+        <p:txBody>
+          <a:bodyPr/>
+          <a:p/>
+        </p:txBody>
       </p:sp>
       <p:sp>
         <p:nvSpPr>
@@ -23893,6 +24385,10 @@
             <a:prstDash val="solid"/>
           </a:ln>
         </p:spPr>
+        <p:txBody>
+          <a:bodyPr/>
+          <a:p/>
+        </p:txBody>
       </p:sp>
       <p:sp>
         <p:nvSpPr>
@@ -23918,6 +24414,10 @@
             <a:prstDash val="solid"/>
           </a:ln>
         </p:spPr>
+        <p:txBody>
+          <a:bodyPr/>
+          <a:p/>
+        </p:txBody>
       </p:sp>
       <p:sp>
         <p:nvSpPr>
@@ -24257,6 +24757,10 @@
             <a:prstDash val="solid"/>
           </a:ln>
         </p:spPr>
+        <p:txBody>
+          <a:bodyPr/>
+          <a:p/>
+        </p:txBody>
       </p:sp>
       <p:sp>
         <p:nvSpPr>
@@ -24362,6 +24866,10 @@
             <a:prstDash val="solid"/>
           </a:ln>
         </p:spPr>
+        <p:txBody>
+          <a:bodyPr/>
+          <a:p/>
+        </p:txBody>
       </p:sp>
       <p:sp>
         <p:nvSpPr>
@@ -24467,6 +24975,10 @@
             <a:prstDash val="solid"/>
           </a:ln>
         </p:spPr>
+        <p:txBody>
+          <a:bodyPr/>
+          <a:p/>
+        </p:txBody>
       </p:sp>
       <p:sp>
         <p:nvSpPr>
@@ -24696,6 +25208,10 @@
             <a:prstDash val="dash"/>
           </a:ln>
         </p:spPr>
+        <p:txBody>
+          <a:bodyPr/>
+          <a:p/>
+        </p:txBody>
       </p:sp>
       <p:sp>
         <p:nvSpPr>
@@ -24723,6 +25239,10 @@
             <a:prstDash val="solid"/>
           </a:ln>
         </p:spPr>
+        <p:txBody>
+          <a:bodyPr/>
+          <a:p/>
+        </p:txBody>
       </p:sp>
       <p:sp>
         <p:nvSpPr>
@@ -25062,6 +25582,10 @@
             <a:prstDash val="solid"/>
           </a:ln>
         </p:spPr>
+        <p:txBody>
+          <a:bodyPr/>
+          <a:p/>
+        </p:txBody>
       </p:sp>
       <p:sp>
         <p:nvSpPr>
@@ -25424,6 +25948,10 @@
             <a:prstDash val="solid"/>
           </a:ln>
         </p:spPr>
+        <p:txBody>
+          <a:bodyPr/>
+          <a:p/>
+        </p:txBody>
       </p:sp>
       <p:sp>
         <p:nvSpPr>
@@ -25566,6 +26094,10 @@
             <a:prstDash val="solid"/>
           </a:ln>
         </p:spPr>
+        <p:txBody>
+          <a:bodyPr/>
+          <a:p/>
+        </p:txBody>
       </p:sp>
       <p:sp>
         <p:nvSpPr>
@@ -25708,6 +26240,10 @@
             <a:prstDash val="solid"/>
           </a:ln>
         </p:spPr>
+        <p:txBody>
+          <a:bodyPr/>
+          <a:p/>
+        </p:txBody>
       </p:sp>
       <p:sp>
         <p:nvSpPr>
@@ -25850,6 +26386,10 @@
             <a:prstDash val="solid"/>
           </a:ln>
         </p:spPr>
+        <p:txBody>
+          <a:bodyPr/>
+          <a:p/>
+        </p:txBody>
       </p:sp>
       <p:sp>
         <p:nvSpPr>
@@ -25992,6 +26532,10 @@
             <a:prstDash val="solid"/>
           </a:ln>
         </p:spPr>
+        <p:txBody>
+          <a:bodyPr/>
+          <a:p/>
+        </p:txBody>
       </p:sp>
       <p:sp>
         <p:nvSpPr>
@@ -26134,6 +26678,10 @@
             <a:prstDash val="solid"/>
           </a:ln>
         </p:spPr>
+        <p:txBody>
+          <a:bodyPr/>
+          <a:p/>
+        </p:txBody>
       </p:sp>
       <p:sp>
         <p:nvSpPr>
@@ -26278,6 +26826,10 @@
             <a:prstDash val="dash"/>
           </a:ln>
         </p:spPr>
+        <p:txBody>
+          <a:bodyPr/>
+          <a:p/>
+        </p:txBody>
       </p:sp>
       <p:sp>
         <p:nvSpPr>
@@ -26305,6 +26857,10 @@
             <a:prstDash val="solid"/>
           </a:ln>
         </p:spPr>
+        <p:txBody>
+          <a:bodyPr/>
+          <a:p/>
+        </p:txBody>
       </p:sp>
       <p:sp>
         <p:nvSpPr>
@@ -26715,6 +27271,10 @@
             <a:prstDash val="solid"/>
           </a:ln>
         </p:spPr>
+        <p:txBody>
+          <a:bodyPr/>
+          <a:p/>
+        </p:txBody>
       </p:sp>
       <p:sp>
         <p:nvSpPr>
@@ -26820,6 +27380,10 @@
             <a:prstDash val="solid"/>
           </a:ln>
         </p:spPr>
+        <p:txBody>
+          <a:bodyPr/>
+          <a:p/>
+        </p:txBody>
       </p:sp>
       <p:sp>
         <p:nvSpPr>
@@ -26925,6 +27489,10 @@
             <a:prstDash val="solid"/>
           </a:ln>
         </p:spPr>
+        <p:txBody>
+          <a:bodyPr/>
+          <a:p/>
+        </p:txBody>
       </p:sp>
       <p:sp>
         <p:nvSpPr>
@@ -27030,6 +27598,10 @@
             <a:prstDash val="solid"/>
           </a:ln>
         </p:spPr>
+        <p:txBody>
+          <a:bodyPr/>
+          <a:p/>
+        </p:txBody>
       </p:sp>
       <p:sp>
         <p:nvSpPr>
@@ -27135,6 +27707,10 @@
             <a:prstDash val="solid"/>
           </a:ln>
         </p:spPr>
+        <p:txBody>
+          <a:bodyPr/>
+          <a:p/>
+        </p:txBody>
       </p:sp>
       <p:sp>
         <p:nvSpPr>
@@ -27240,6 +27816,10 @@
             <a:prstDash val="solid"/>
           </a:ln>
         </p:spPr>
+        <p:txBody>
+          <a:bodyPr/>
+          <a:p/>
+        </p:txBody>
       </p:sp>
       <p:sp>
         <p:nvSpPr>
@@ -27345,6 +27925,10 @@
             <a:prstDash val="solid"/>
           </a:ln>
         </p:spPr>
+        <p:txBody>
+          <a:bodyPr/>
+          <a:p/>
+        </p:txBody>
       </p:sp>
       <p:sp>
         <p:nvSpPr>
@@ -27370,6 +27954,10 @@
             <a:prstDash val="solid"/>
           </a:ln>
         </p:spPr>
+        <p:txBody>
+          <a:bodyPr/>
+          <a:p/>
+        </p:txBody>
       </p:sp>
       <p:sp>
         <p:nvSpPr>
@@ -27675,6 +28263,10 @@
             <a:prstDash val="solid"/>
           </a:ln>
         </p:spPr>
+        <p:txBody>
+          <a:bodyPr/>
+          <a:p/>
+        </p:txBody>
       </p:sp>
       <p:sp>
         <p:nvSpPr>
@@ -27817,6 +28409,10 @@
             <a:prstDash val="solid"/>
           </a:ln>
         </p:spPr>
+        <p:txBody>
+          <a:bodyPr/>
+          <a:p/>
+        </p:txBody>
       </p:sp>
       <p:sp>
         <p:nvSpPr>
@@ -27959,6 +28555,10 @@
             <a:prstDash val="solid"/>
           </a:ln>
         </p:spPr>
+        <p:txBody>
+          <a:bodyPr/>
+          <a:p/>
+        </p:txBody>
       </p:sp>
       <p:sp>
         <p:nvSpPr>
@@ -28101,6 +28701,10 @@
             <a:prstDash val="solid"/>
           </a:ln>
         </p:spPr>
+        <p:txBody>
+          <a:bodyPr/>
+          <a:p/>
+        </p:txBody>
       </p:sp>
       <p:sp>
         <p:nvSpPr>
@@ -28243,6 +28847,10 @@
             <a:prstDash val="solid"/>
           </a:ln>
         </p:spPr>
+        <p:txBody>
+          <a:bodyPr/>
+          <a:p/>
+        </p:txBody>
       </p:sp>
       <p:sp>
         <p:nvSpPr>
@@ -28568,6 +29176,10 @@
             <a:prstDash val="solid"/>
           </a:ln>
         </p:spPr>
+        <p:txBody>
+          <a:bodyPr/>
+          <a:p/>
+        </p:txBody>
       </p:sp>
       <p:sp>
         <p:nvSpPr>
@@ -28673,6 +29285,10 @@
             <a:prstDash val="solid"/>
           </a:ln>
         </p:spPr>
+        <p:txBody>
+          <a:bodyPr/>
+          <a:p/>
+        </p:txBody>
       </p:sp>
       <p:sp>
         <p:nvSpPr>
@@ -28778,6 +29394,10 @@
             <a:prstDash val="solid"/>
           </a:ln>
         </p:spPr>
+        <p:txBody>
+          <a:bodyPr/>
+          <a:p/>
+        </p:txBody>
       </p:sp>
       <p:sp>
         <p:nvSpPr>
@@ -28883,6 +29503,10 @@
             <a:prstDash val="dash"/>
           </a:ln>
         </p:spPr>
+        <p:txBody>
+          <a:bodyPr/>
+          <a:p/>
+        </p:txBody>
       </p:sp>
       <p:sp>
         <p:nvSpPr>
@@ -28910,6 +29534,10 @@
             <a:prstDash val="solid"/>
           </a:ln>
         </p:spPr>
+        <p:txBody>
+          <a:bodyPr/>
+          <a:p/>
+        </p:txBody>
       </p:sp>
       <p:sp>
         <p:nvSpPr>
@@ -29339,6 +29967,10 @@
             <a:prstDash val="solid"/>
           </a:ln>
         </p:spPr>
+        <p:txBody>
+          <a:bodyPr/>
+          <a:p/>
+        </p:txBody>
       </p:sp>
       <p:sp>
         <p:nvSpPr>
@@ -29481,6 +30113,10 @@
             <a:prstDash val="solid"/>
           </a:ln>
         </p:spPr>
+        <p:txBody>
+          <a:bodyPr/>
+          <a:p/>
+        </p:txBody>
       </p:sp>
       <p:sp>
         <p:nvSpPr>
@@ -29623,6 +30259,10 @@
             <a:prstDash val="solid"/>
           </a:ln>
         </p:spPr>
+        <p:txBody>
+          <a:bodyPr/>
+          <a:p/>
+        </p:txBody>
       </p:sp>
       <p:sp>
         <p:nvSpPr>
@@ -29765,6 +30405,10 @@
             <a:prstDash val="solid"/>
           </a:ln>
         </p:spPr>
+        <p:txBody>
+          <a:bodyPr/>
+          <a:p/>
+        </p:txBody>
       </p:sp>
       <p:sp>
         <p:nvSpPr>
@@ -29907,6 +30551,10 @@
             <a:prstDash val="solid"/>
           </a:ln>
         </p:spPr>
+        <p:txBody>
+          <a:bodyPr/>
+          <a:p/>
+        </p:txBody>
       </p:sp>
       <p:sp>
         <p:nvSpPr>
@@ -30051,6 +30699,10 @@
             <a:prstDash val="dash"/>
           </a:ln>
         </p:spPr>
+        <p:txBody>
+          <a:bodyPr/>
+          <a:p/>
+        </p:txBody>
       </p:sp>
       <p:sp>
         <p:nvSpPr>
@@ -30078,6 +30730,10 @@
             <a:prstDash val="solid"/>
           </a:ln>
         </p:spPr>
+        <p:txBody>
+          <a:bodyPr/>
+          <a:p/>
+        </p:txBody>
       </p:sp>
       <p:sp>
         <p:nvSpPr>
@@ -30527,6 +31183,10 @@
             <a:prstDash val="solid"/>
           </a:ln>
         </p:spPr>
+        <p:txBody>
+          <a:bodyPr/>
+          <a:p/>
+        </p:txBody>
       </p:sp>
       <p:sp>
         <p:nvSpPr>
@@ -30632,6 +31292,10 @@
             <a:prstDash val="solid"/>
           </a:ln>
         </p:spPr>
+        <p:txBody>
+          <a:bodyPr/>
+          <a:p/>
+        </p:txBody>
       </p:sp>
       <p:sp>
         <p:nvSpPr>
@@ -30737,6 +31401,10 @@
             <a:prstDash val="solid"/>
           </a:ln>
         </p:spPr>
+        <p:txBody>
+          <a:bodyPr/>
+          <a:p/>
+        </p:txBody>
       </p:sp>
       <p:sp>
         <p:nvSpPr>
@@ -30842,6 +31510,10 @@
             <a:prstDash val="solid"/>
           </a:ln>
         </p:spPr>
+        <p:txBody>
+          <a:bodyPr/>
+          <a:p/>
+        </p:txBody>
       </p:sp>
       <p:sp>
         <p:nvSpPr>
@@ -30915,7 +31587,7 @@
                 <a:ea typeface="Calibri" pitchFamily="34" charset="-122"/>
                 <a:cs typeface="Calibri" pitchFamily="34" charset="-120"/>
               </a:rPr>
-              <a:t>Pick which public network you use. The price differs a lot between them, and by time of day.</a:t>
+              <a:t>Pick which public network you use, or 'Custom rate' for a workplace charger or a tariff not listed. The price differs a lot between networks and by time of day.</a:t>
             </a:r>
             <a:endParaRPr lang="en-US" sz="1050" dirty="0"/>
           </a:p>
@@ -30947,6 +31619,10 @@
             <a:prstDash val="dash"/>
           </a:ln>
         </p:spPr>
+        <p:txBody>
+          <a:bodyPr/>
+          <a:p/>
+        </p:txBody>
       </p:sp>
       <p:sp>
         <p:nvSpPr>
@@ -30974,6 +31650,10 @@
             <a:prstDash val="solid"/>
           </a:ln>
         </p:spPr>
+        <p:txBody>
+          <a:bodyPr/>
+          <a:p/>
+        </p:txBody>
       </p:sp>
       <p:sp>
         <p:nvSpPr>
@@ -31171,7 +31851,7 @@
                 <a:ea typeface="Calibri" pitchFamily="34" charset="-122"/>
                 <a:cs typeface="Calibri" pitchFamily="34" charset="-120"/>
               </a:rPr>
-              <a:t>The collapsed 'Other price sources (field survey)' section</a:t>
+              <a:t>The custom rate box that appears when you pick 'Custom rate'</a:t>
             </a:r>
             <a:endParaRPr lang="en-US" sz="1050" dirty="0"/>
           </a:p>
@@ -31403,6 +32083,10 @@
             <a:prstDash val="solid"/>
           </a:ln>
         </p:spPr>
+        <p:txBody>
+          <a:bodyPr/>
+          <a:p/>
+        </p:txBody>
       </p:sp>
       <p:sp>
         <p:nvSpPr>
@@ -31545,6 +32229,10 @@
             <a:prstDash val="solid"/>
           </a:ln>
         </p:spPr>
+        <p:txBody>
+          <a:bodyPr/>
+          <a:p/>
+        </p:txBody>
       </p:sp>
       <p:sp>
         <p:nvSpPr>
@@ -31687,6 +32375,10 @@
             <a:prstDash val="solid"/>
           </a:ln>
         </p:spPr>
+        <p:txBody>
+          <a:bodyPr/>
+          <a:p/>
+        </p:txBody>
       </p:sp>
       <p:sp>
         <p:nvSpPr>
@@ -31829,6 +32521,10 @@
             <a:prstDash val="solid"/>
           </a:ln>
         </p:spPr>
+        <p:txBody>
+          <a:bodyPr/>
+          <a:p/>
+        </p:txBody>
       </p:sp>
       <p:sp>
         <p:nvSpPr>
@@ -31971,6 +32667,10 @@
             <a:prstDash val="solid"/>
           </a:ln>
         </p:spPr>
+        <p:txBody>
+          <a:bodyPr/>
+          <a:p/>
+        </p:txBody>
       </p:sp>
       <p:sp>
         <p:nvSpPr>
@@ -32083,7 +32783,7 @@
                 <a:ea typeface="Calibri" pitchFamily="34" charset="-122"/>
                 <a:cs typeface="Calibri" pitchFamily="34" charset="-120"/>
               </a:rPr>
-              <a:t>Evergo, or JPS Charge 'n Go at one of its three times of day. The rate box below updates and renames itself to match.</a:t>
+              <a:t>Evergo, JPS Charge 'n Go at one of its three times of day, or 'Custom rate' if you charge somewhere not listed. The rate box below updates and renames itself to match.</a:t>
             </a:r>
             <a:endParaRPr lang="en-US" sz="1150" dirty="0"/>
           </a:p>
@@ -32115,6 +32815,10 @@
             <a:prstDash val="dash"/>
           </a:ln>
         </p:spPr>
+        <p:txBody>
+          <a:bodyPr/>
+          <a:p/>
+        </p:txBody>
       </p:sp>
       <p:sp>
         <p:nvSpPr>
@@ -32142,6 +32846,10 @@
             <a:prstDash val="solid"/>
           </a:ln>
         </p:spPr>
+        <p:txBody>
+          <a:bodyPr/>
+          <a:p/>
+        </p:txBody>
       </p:sp>
       <p:sp>
         <p:nvSpPr>
@@ -32371,6 +33079,10 @@
             <a:prstDash val="solid"/>
           </a:ln>
         </p:spPr>
+        <p:txBody>
+          <a:bodyPr/>
+          <a:p/>
+        </p:txBody>
       </p:sp>
       <p:sp>
         <p:nvSpPr>
@@ -32396,6 +33108,10 @@
             <a:prstDash val="solid"/>
           </a:ln>
         </p:spPr>
+        <p:txBody>
+          <a:bodyPr/>
+          <a:p/>
+        </p:txBody>
       </p:sp>
       <p:sp>
         <p:nvSpPr>
@@ -32469,7 +33185,7 @@
                 <a:ea typeface="Calibri" pitchFamily="34" charset="-122"/>
                 <a:cs typeface="Calibri" pitchFamily="34" charset="-120"/>
               </a:rPr>
-              <a:t>Don't want to type a fuel price?  </a:t>
+              <a:t>Don't want to type a fuel price?  Leave it blank and the dashboard uses a surveyed Kingston average, and tells you it is doing so. The list of named stations has been removed: a markup surveyed on three dates goes stale, while the price on the pump in front of you does not.</a:t>
             </a:r>
             <a:pPr indent="0" marL="0">
               <a:buNone/>
@@ -32483,7 +33199,7 @@
                 <a:ea typeface="Calibri" pitchFamily="34" charset="-122"/>
                 <a:cs typeface="Calibri" pitchFamily="34" charset="-120"/>
               </a:rPr>
-              <a:t>Open 'Other price sources (field survey)' to pick a surveyed Kingston station or the island average instead.</a:t>
+              <a:t/>
             </a:r>
             <a:endParaRPr lang="en-US" sz="1100" dirty="0"/>
           </a:p>
@@ -32735,6 +33451,10 @@
             <a:prstDash val="solid"/>
           </a:ln>
         </p:spPr>
+        <p:txBody>
+          <a:bodyPr/>
+          <a:p/>
+        </p:txBody>
       </p:sp>
       <p:sp>
         <p:nvSpPr>
@@ -32957,6 +33677,10 @@
             <a:prstDash val="solid"/>
           </a:ln>
         </p:spPr>
+        <p:txBody>
+          <a:bodyPr/>
+          <a:p/>
+        </p:txBody>
       </p:sp>
       <p:sp>
         <p:nvSpPr>
@@ -33179,6 +33903,10 @@
             <a:prstDash val="solid"/>
           </a:ln>
         </p:spPr>
+        <p:txBody>
+          <a:bodyPr/>
+          <a:p/>
+        </p:txBody>
       </p:sp>
       <p:sp>
         <p:nvSpPr>
@@ -33362,6 +34090,10 @@
             <a:prstDash val="solid"/>
           </a:ln>
         </p:spPr>
+        <p:txBody>
+          <a:bodyPr/>
+          <a:p/>
+        </p:txBody>
       </p:sp>
       <p:sp>
         <p:nvSpPr>
@@ -33584,6 +34316,10 @@
             <a:prstDash val="solid"/>
           </a:ln>
         </p:spPr>
+        <p:txBody>
+          <a:bodyPr/>
+          <a:p/>
+        </p:txBody>
       </p:sp>
       <p:sp>
         <p:nvSpPr>
@@ -33806,6 +34542,10 @@
             <a:prstDash val="solid"/>
           </a:ln>
         </p:spPr>
+        <p:txBody>
+          <a:bodyPr/>
+          <a:p/>
+        </p:txBody>
       </p:sp>
       <p:sp>
         <p:nvSpPr>
@@ -33831,6 +34571,10 @@
             <a:prstDash val="solid"/>
           </a:ln>
         </p:spPr>
+        <p:txBody>
+          <a:bodyPr/>
+          <a:p/>
+        </p:txBody>
       </p:sp>
       <p:sp>
         <p:nvSpPr>
@@ -34060,6 +34804,10 @@
             <a:prstDash val="solid"/>
           </a:ln>
         </p:spPr>
+        <p:txBody>
+          <a:bodyPr/>
+          <a:p/>
+        </p:txBody>
       </p:sp>
       <p:sp>
         <p:nvSpPr>

--- a/docs/EV_Dashboard_User_Guide.pptx
+++ b/docs/EV_Dashboard_User_Guide.pptx
@@ -27,7 +27,6 @@
     <p:sldId id="275" r:id="rId21"/>
     <p:sldId id="276" r:id="rId22"/>
     <p:sldId id="277" r:id="rId23"/>
-    <p:sldId id="278" r:id="rId24"/>
     <p:sldId id="279" r:id="rId25"/>
     <p:sldId id="280" r:id="rId26"/>
     <p:sldId id="281" r:id="rId27"/>
@@ -1791,94 +1790,6 @@
             <a:fld id="{F7021451-1387-4CA6-816F-3879F97B5CBC}" type="slidenum">
               <a:rPr lang="en-US"/>
               <a:t>22</a:t>
-            </a:fld>
-            <a:endParaRPr lang="en-US"/>
-          </a:p>
-        </p:txBody>
-      </p:sp>
-    </p:spTree>
-    <p:extLst>
-      <p:ext uri="{BB962C8B-B14F-4D97-AF65-F5344CB8AC3E}">
-        <p14:creationId xmlns:p14="http://schemas.microsoft.com/office/powerpoint/2010/main" val="1024086991"/>
-      </p:ext>
-    </p:extLst>
-  </p:cSld>
-  <p:clrMapOvr>
-    <a:masterClrMapping/>
-  </p:clrMapOvr>
-</p:notes>
-</file>
-
-<file path=ppt/notesSlides/notesSlide23.xml><?xml version="1.0" encoding="utf-8"?>
-<p:notes xmlns:a="http://schemas.openxmlformats.org/drawingml/2006/main" xmlns:r="http://schemas.openxmlformats.org/officeDocument/2006/relationships" xmlns:p="http://schemas.openxmlformats.org/presentationml/2006/main">
-  <p:cSld>
-    <p:spTree>
-      <p:nvGrpSpPr>
-        <p:cNvPr id="1" name=""/>
-        <p:cNvGrpSpPr/>
-        <p:nvPr/>
-      </p:nvGrpSpPr>
-      <p:grpSpPr>
-        <a:xfrm>
-          <a:off x="0" y="0"/>
-          <a:ext cx="0" cy="0"/>
-          <a:chOff x="0" y="0"/>
-          <a:chExt cx="0" cy="0"/>
-        </a:xfrm>
-      </p:grpSpPr>
-      <p:sp>
-        <p:nvSpPr>
-          <p:cNvPr id="2" name="Slide Image Placeholder 1"/>
-          <p:cNvSpPr>
-            <a:spLocks noGrp="1" noRot="1" noChangeAspect="1"/>
-          </p:cNvSpPr>
-          <p:nvPr>
-            <p:ph type="sldImg"/>
-          </p:nvPr>
-        </p:nvSpPr>
-        <p:spPr/>
-      </p:sp>
-      <p:sp>
-        <p:nvSpPr>
-          <p:cNvPr id="3" name="Notes Placeholder 2"/>
-          <p:cNvSpPr>
-            <a:spLocks noGrp="1"/>
-          </p:cNvSpPr>
-          <p:nvPr>
-            <p:ph type="body" idx="1"/>
-          </p:nvPr>
-        </p:nvSpPr>
-        <p:spPr/>
-        <p:txBody>
-          <a:bodyPr/>
-          <a:lstStyle/>
-          <a:p>
-            <a:r>
-              <a:rPr lang="en-US" dirty="0"/>
-              <a:t/>
-            </a:r>
-            <a:endParaRPr lang="en-US" dirty="0"/>
-          </a:p>
-        </p:txBody>
-      </p:sp>
-      <p:sp>
-        <p:nvSpPr>
-          <p:cNvPr id="4" name="Slide Number Placeholder 3"/>
-          <p:cNvSpPr>
-            <a:spLocks noGrp="1"/>
-          </p:cNvSpPr>
-          <p:nvPr>
-            <p:ph type="sldNum" sz="quarter" idx="10"/>
-          </p:nvPr>
-        </p:nvSpPr>
-        <p:spPr/>
-        <p:txBody>
-          <a:bodyPr/>
-          <a:lstStyle/>
-          <a:p>
-            <a:fld id="{F7021451-1387-4CA6-816F-3879F97B5CBC}" type="slidenum">
-              <a:rPr lang="en-US"/>
-              <a:t>23</a:t>
             </a:fld>
             <a:endParaRPr lang="en-US"/>
           </a:p>
@@ -13559,7 +13470,7 @@
                 <a:ea typeface="Calibri" pitchFamily="34" charset="-122"/>
                 <a:cs typeface="Calibri" pitchFamily="34" charset="-120"/>
               </a:rPr>
-              <a:t>Route Cost Map   </a:t>
+              <a:t>Fleet Penetration Simulator   </a:t>
             </a:r>
             <a:pPr indent="0" marL="0">
               <a:buNone/>
@@ -13573,7 +13484,7 @@
                 <a:ea typeface="Calibri" pitchFamily="34" charset="-122"/>
                 <a:cs typeface="Calibri" pitchFamily="34" charset="-120"/>
               </a:rPr>
-              <a:t>Still being built</a:t>
+              <a:t>National fleet projections</a:t>
             </a:r>
             <a:endParaRPr lang="en-US" sz="1150" dirty="0"/>
           </a:p>
@@ -13680,7 +13591,7 @@
                 <a:ea typeface="Calibri" pitchFamily="34" charset="-122"/>
                 <a:cs typeface="Calibri" pitchFamily="34" charset="-120"/>
               </a:rPr>
-              <a:t>Fleet Penetration Simulator   </a:t>
+              <a:t>Emissions Impact Calculator   </a:t>
             </a:r>
             <a:pPr indent="0" marL="0">
               <a:buNone/>
@@ -13694,7 +13605,7 @@
                 <a:ea typeface="Calibri" pitchFamily="34" charset="-122"/>
                 <a:cs typeface="Calibri" pitchFamily="34" charset="-120"/>
               </a:rPr>
-              <a:t>National fleet projections</a:t>
+              <a:t>CO2 for one vehicle</a:t>
             </a:r>
             <a:endParaRPr lang="en-US" sz="1150" dirty="0"/>
           </a:p>
@@ -13777,127 +13688,6 @@
         <p:spPr>
           <a:xfrm>
             <a:off x="905256" y="5614416"/>
-            <a:ext cx="5120640" cy="365760"/>
-          </a:xfrm>
-          <a:prstGeom prst="rect">
-            <a:avLst/>
-          </a:prstGeom>
-          <a:noFill/>
-          <a:ln/>
-        </p:spPr>
-        <p:txBody>
-          <a:bodyPr wrap="square" lIns="0" tIns="0" rIns="0" bIns="0" rtlCol="0" anchor="ctr"/>
-          <a:lstStyle/>
-          <a:p>
-            <a:pPr indent="0" marL="0">
-              <a:buNone/>
-            </a:pPr>
-            <a:r>
-              <a:rPr lang="en-US" sz="1150" b="1" dirty="0">
-                <a:solidFill>
-                  <a:srgbClr val="0E2A24"/>
-                </a:solidFill>
-                <a:latin typeface="Calibri" pitchFamily="34" charset="0"/>
-                <a:ea typeface="Calibri" pitchFamily="34" charset="-122"/>
-                <a:cs typeface="Calibri" pitchFamily="34" charset="-120"/>
-              </a:rPr>
-              <a:t>Emissions Impact Calculator   </a:t>
-            </a:r>
-            <a:pPr indent="0" marL="0">
-              <a:buNone/>
-            </a:pPr>
-            <a:r>
-              <a:rPr lang="en-US" sz="1150" dirty="0">
-                <a:solidFill>
-                  <a:srgbClr val="6B7A77"/>
-                </a:solidFill>
-                <a:latin typeface="Calibri" pitchFamily="34" charset="0"/>
-                <a:ea typeface="Calibri" pitchFamily="34" charset="-122"/>
-                <a:cs typeface="Calibri" pitchFamily="34" charset="-120"/>
-              </a:rPr>
-              <a:t>CO2 for one vehicle</a:t>
-            </a:r>
-            <a:endParaRPr lang="en-US" sz="1150" dirty="0"/>
-          </a:p>
-        </p:txBody>
-      </p:sp>
-      <p:sp>
-        <p:nvSpPr>
-          <p:cNvPr id="35" name="Shape 33"/>
-          <p:cNvSpPr/>
-          <p:nvPr/>
-        </p:nvSpPr>
-        <p:spPr>
-          <a:xfrm>
-            <a:off x="6172200" y="5650992"/>
-            <a:ext cx="292608" cy="292608"/>
-          </a:xfrm>
-          <a:prstGeom prst="ellipse">
-            <a:avLst/>
-          </a:prstGeom>
-          <a:solidFill>
-            <a:srgbClr val="C55A11"/>
-          </a:solidFill>
-          <a:ln w="12700">
-            <a:solidFill>
-              <a:srgbClr val="C55A11"/>
-            </a:solidFill>
-            <a:prstDash val="solid"/>
-          </a:ln>
-        </p:spPr>
-        <p:txBody>
-          <a:bodyPr/>
-          <a:p/>
-        </p:txBody>
-      </p:sp>
-      <p:sp>
-        <p:nvSpPr>
-          <p:cNvPr id="36" name="Text 34"/>
-          <p:cNvSpPr/>
-          <p:nvPr/>
-        </p:nvSpPr>
-        <p:spPr>
-          <a:xfrm>
-            <a:off x="6172200" y="5650992"/>
-            <a:ext cx="292608" cy="292608"/>
-          </a:xfrm>
-          <a:prstGeom prst="rect">
-            <a:avLst/>
-          </a:prstGeom>
-          <a:noFill/>
-          <a:ln/>
-        </p:spPr>
-        <p:txBody>
-          <a:bodyPr wrap="square" lIns="0" tIns="0" rIns="0" bIns="0" rtlCol="0" anchor="ctr"/>
-          <a:lstStyle/>
-          <a:p>
-            <a:pPr algn="ctr" indent="0" marL="0">
-              <a:buNone/>
-            </a:pPr>
-            <a:r>
-              <a:rPr lang="en-US" sz="1150" b="1" dirty="0">
-                <a:solidFill>
-                  <a:srgbClr val="FFFFFF"/>
-                </a:solidFill>
-                <a:latin typeface="Calibri" pitchFamily="34" charset="0"/>
-                <a:ea typeface="Calibri" pitchFamily="34" charset="-122"/>
-                <a:cs typeface="Calibri" pitchFamily="34" charset="-120"/>
-              </a:rPr>
-              <a:t>8</a:t>
-            </a:r>
-            <a:endParaRPr lang="en-US" sz="1150" dirty="0"/>
-          </a:p>
-        </p:txBody>
-      </p:sp>
-      <p:sp>
-        <p:nvSpPr>
-          <p:cNvPr id="37" name="Text 35"/>
-          <p:cNvSpPr/>
-          <p:nvPr/>
-        </p:nvSpPr>
-        <p:spPr>
-          <a:xfrm>
-            <a:off x="6574536" y="5614416"/>
             <a:ext cx="5120640" cy="365760"/>
           </a:xfrm>
           <a:prstGeom prst="rect">
@@ -17415,327 +17205,6 @@
               <a:t>Jamaica EV Dashboard - User Guide</a:t>
             </a:r>
             <a:endParaRPr lang="en-US" sz="900" dirty="0"/>
-          </a:p>
-        </p:txBody>
-      </p:sp>
-    </p:spTree>
-  </p:cSld>
-  <p:clrMapOvr>
-    <a:masterClrMapping/>
-  </p:clrMapOvr>
-</p:sld>
-</file>
-
-<file path=ppt/slides/slide23.xml><?xml version="1.0" encoding="utf-8"?>
-<p:sld xmlns:a="http://schemas.openxmlformats.org/drawingml/2006/main" xmlns:r="http://schemas.openxmlformats.org/officeDocument/2006/relationships" xmlns:p="http://schemas.openxmlformats.org/presentationml/2006/main">
-  <p:cSld name="Slide 23">
-    <p:bg>
-      <p:bgPr>
-        <a:solidFill>
-          <a:srgbClr val="0E2A24"/>
-        </a:solidFill>
-      </p:bgPr>
-    </p:bg>
-    <p:spTree>
-      <p:nvGrpSpPr>
-        <p:cNvPr id="1" name=""/>
-        <p:cNvGrpSpPr/>
-        <p:nvPr/>
-      </p:nvGrpSpPr>
-      <p:grpSpPr>
-        <a:xfrm>
-          <a:off x="0" y="0"/>
-          <a:ext cx="0" cy="0"/>
-          <a:chOff x="0" y="0"/>
-          <a:chExt cx="0" cy="0"/>
-        </a:xfrm>
-      </p:grpSpPr>
-      <p:sp>
-        <p:nvSpPr>
-          <p:cNvPr id="2" name="Shape 0"/>
-          <p:cNvSpPr/>
-          <p:nvPr/>
-        </p:nvSpPr>
-        <p:spPr>
-          <a:xfrm>
-            <a:off x="822960" y="2286000"/>
-            <a:ext cx="1371600" cy="1371600"/>
-          </a:xfrm>
-          <a:prstGeom prst="roundRect">
-            <a:avLst>
-              <a:gd name="adj" fmla="val 6667"/>
-            </a:avLst>
-          </a:prstGeom>
-          <a:solidFill>
-            <a:srgbClr val="2A4A42"/>
-          </a:solidFill>
-          <a:ln w="19050">
-            <a:solidFill>
-              <a:srgbClr val="3E6259"/>
-            </a:solidFill>
-            <a:prstDash val="dash"/>
-          </a:ln>
-        </p:spPr>
-        <p:txBody>
-          <a:bodyPr/>
-          <a:p/>
-        </p:txBody>
-      </p:sp>
-      <p:sp>
-        <p:nvSpPr>
-          <p:cNvPr id="3" name="Text 1"/>
-          <p:cNvSpPr/>
-          <p:nvPr/>
-        </p:nvSpPr>
-        <p:spPr>
-          <a:xfrm>
-            <a:off x="822960" y="2286000"/>
-            <a:ext cx="1371600" cy="1371600"/>
-          </a:xfrm>
-          <a:prstGeom prst="rect">
-            <a:avLst/>
-          </a:prstGeom>
-          <a:noFill/>
-          <a:ln/>
-        </p:spPr>
-        <p:txBody>
-          <a:bodyPr wrap="square" lIns="0" tIns="0" rIns="0" bIns="0" rtlCol="0" anchor="ctr"/>
-          <a:lstStyle/>
-          <a:p>
-            <a:pPr algn="ctr" indent="0" marL="0">
-              <a:buNone/>
-            </a:pPr>
-            <a:r>
-              <a:rPr lang="en-US" sz="6200" b="1" dirty="0">
-                <a:solidFill>
-                  <a:srgbClr val="7FA69C"/>
-                </a:solidFill>
-                <a:latin typeface="Cambria" pitchFamily="34" charset="0"/>
-                <a:ea typeface="Cambria" pitchFamily="34" charset="-122"/>
-                <a:cs typeface="Cambria" pitchFamily="34" charset="-120"/>
-              </a:rPr>
-              <a:t>5</a:t>
-            </a:r>
-            <a:endParaRPr lang="en-US" sz="6200" dirty="0"/>
-          </a:p>
-        </p:txBody>
-      </p:sp>
-      <p:sp>
-        <p:nvSpPr>
-          <p:cNvPr id="4" name="Text 2"/>
-          <p:cNvSpPr/>
-          <p:nvPr/>
-        </p:nvSpPr>
-        <p:spPr>
-          <a:xfrm>
-            <a:off x="2514600" y="2331720"/>
-            <a:ext cx="8686800" cy="292608"/>
-          </a:xfrm>
-          <a:prstGeom prst="rect">
-            <a:avLst/>
-          </a:prstGeom>
-          <a:noFill/>
-          <a:ln/>
-        </p:spPr>
-        <p:txBody>
-          <a:bodyPr wrap="square" lIns="0" tIns="0" rIns="0" bIns="0" rtlCol="0" anchor="ctr"/>
-          <a:lstStyle/>
-          <a:p>
-            <a:pPr indent="0" marL="0">
-              <a:buNone/>
-            </a:pPr>
-            <a:r>
-              <a:rPr lang="en-US" sz="1200" b="1" spc="200" kern="0" dirty="0">
-                <a:solidFill>
-                  <a:srgbClr val="7FA69C"/>
-                </a:solidFill>
-                <a:latin typeface="Calibri" pitchFamily="34" charset="0"/>
-                <a:ea typeface="Calibri" pitchFamily="34" charset="-122"/>
-                <a:cs typeface="Calibri" pitchFamily="34" charset="-120"/>
-              </a:rPr>
-              <a:t>MODULE 5</a:t>
-            </a:r>
-            <a:endParaRPr lang="en-US" sz="1200" dirty="0"/>
-          </a:p>
-        </p:txBody>
-      </p:sp>
-      <p:sp>
-        <p:nvSpPr>
-          <p:cNvPr id="5" name="Text 3"/>
-          <p:cNvSpPr/>
-          <p:nvPr/>
-        </p:nvSpPr>
-        <p:spPr>
-          <a:xfrm>
-            <a:off x="2514600" y="2624328"/>
-            <a:ext cx="9052560" cy="640080"/>
-          </a:xfrm>
-          <a:prstGeom prst="rect">
-            <a:avLst/>
-          </a:prstGeom>
-          <a:noFill/>
-          <a:ln/>
-        </p:spPr>
-        <p:txBody>
-          <a:bodyPr wrap="square" lIns="0" tIns="0" rIns="0" bIns="0" rtlCol="0" anchor="ctr"/>
-          <a:lstStyle/>
-          <a:p>
-            <a:pPr indent="0" marL="0">
-              <a:buNone/>
-            </a:pPr>
-            <a:r>
-              <a:rPr lang="en-US" sz="3400" b="1" dirty="0">
-                <a:solidFill>
-                  <a:srgbClr val="FFFFFF"/>
-                </a:solidFill>
-                <a:latin typeface="Cambria" pitchFamily="34" charset="0"/>
-                <a:ea typeface="Cambria" pitchFamily="34" charset="-122"/>
-                <a:cs typeface="Cambria" pitchFamily="34" charset="-120"/>
-              </a:rPr>
-              <a:t>Route Cost Map</a:t>
-            </a:r>
-            <a:endParaRPr lang="en-US" sz="3400" dirty="0"/>
-          </a:p>
-        </p:txBody>
-      </p:sp>
-      <p:sp>
-        <p:nvSpPr>
-          <p:cNvPr id="6" name="Shape 4"/>
-          <p:cNvSpPr/>
-          <p:nvPr/>
-        </p:nvSpPr>
-        <p:spPr>
-          <a:xfrm>
-            <a:off x="2542032" y="3401568"/>
-            <a:ext cx="2377440" cy="384048"/>
-          </a:xfrm>
-          <a:prstGeom prst="roundRect">
-            <a:avLst>
-              <a:gd name="adj" fmla="val 19048"/>
-            </a:avLst>
-          </a:prstGeom>
-          <a:solidFill>
-            <a:srgbClr val="3E6259"/>
-          </a:solidFill>
-          <a:ln w="12700">
-            <a:solidFill>
-              <a:srgbClr val="3E6259"/>
-            </a:solidFill>
-            <a:prstDash val="solid"/>
-          </a:ln>
-        </p:spPr>
-        <p:txBody>
-          <a:bodyPr/>
-          <a:p/>
-        </p:txBody>
-      </p:sp>
-      <p:sp>
-        <p:nvSpPr>
-          <p:cNvPr id="7" name="Text 5"/>
-          <p:cNvSpPr/>
-          <p:nvPr/>
-        </p:nvSpPr>
-        <p:spPr>
-          <a:xfrm>
-            <a:off x="2542032" y="3401568"/>
-            <a:ext cx="2377440" cy="384048"/>
-          </a:xfrm>
-          <a:prstGeom prst="rect">
-            <a:avLst/>
-          </a:prstGeom>
-          <a:noFill/>
-          <a:ln/>
-        </p:spPr>
-        <p:txBody>
-          <a:bodyPr wrap="square" lIns="0" tIns="0" rIns="0" bIns="0" rtlCol="0" anchor="ctr"/>
-          <a:lstStyle/>
-          <a:p>
-            <a:pPr algn="ctr" indent="0" marL="0">
-              <a:buNone/>
-            </a:pPr>
-            <a:r>
-              <a:rPr lang="en-US" sz="1100" b="1" spc="100" kern="0" dirty="0">
-                <a:solidFill>
-                  <a:srgbClr val="FFFFFF"/>
-                </a:solidFill>
-                <a:latin typeface="Calibri" pitchFamily="34" charset="0"/>
-                <a:ea typeface="Calibri" pitchFamily="34" charset="-122"/>
-                <a:cs typeface="Calibri" pitchFamily="34" charset="-120"/>
-              </a:rPr>
-              <a:t>TO BE COMPLETED</a:t>
-            </a:r>
-            <a:endParaRPr lang="en-US" sz="1100" dirty="0"/>
-          </a:p>
-        </p:txBody>
-      </p:sp>
-      <p:sp>
-        <p:nvSpPr>
-          <p:cNvPr id="8" name="Text 6"/>
-          <p:cNvSpPr/>
-          <p:nvPr/>
-        </p:nvSpPr>
-        <p:spPr>
-          <a:xfrm>
-            <a:off x="2542032" y="3950208"/>
-            <a:ext cx="8138160" cy="1097280"/>
-          </a:xfrm>
-          <a:prstGeom prst="rect">
-            <a:avLst/>
-          </a:prstGeom>
-          <a:noFill/>
-          <a:ln/>
-        </p:spPr>
-        <p:txBody>
-          <a:bodyPr wrap="square" lIns="0" tIns="0" rIns="0" bIns="0" rtlCol="0" anchor="ctr"/>
-          <a:lstStyle/>
-          <a:p>
-            <a:pPr indent="0" marL="0">
-              <a:lnSpc>
-                <a:spcPct val="130000"/>
-              </a:lnSpc>
-              <a:buNone/>
-            </a:pPr>
-            <a:r>
-              <a:rPr lang="en-US" sz="1400" dirty="0">
-                <a:solidFill>
-                  <a:srgbClr val="A9C6BF"/>
-                </a:solidFill>
-                <a:latin typeface="Calibri" pitchFamily="34" charset="0"/>
-                <a:ea typeface="Calibri" pitchFamily="34" charset="-122"/>
-                <a:cs typeface="Calibri" pitchFamily="34" charset="-120"/>
-              </a:rPr>
-              <a:t>This page is still being built. It appears in the sidebar and on the home page with a faded card, and opening it shows a short placeholder message.</a:t>
-            </a:r>
-            <a:endParaRPr lang="en-US" sz="1400" dirty="0"/>
-          </a:p>
-          <a:p>
-            <a:pPr indent="0" marL="0">
-              <a:lnSpc>
-                <a:spcPct val="130000"/>
-              </a:lnSpc>
-              <a:buNone/>
-            </a:pPr>
-            <a:endParaRPr lang="en-US" sz="1400" dirty="0"/>
-          </a:p>
-          <a:p>
-            <a:pPr indent="0" marL="0">
-              <a:lnSpc>
-                <a:spcPct val="130000"/>
-              </a:lnSpc>
-              <a:buNone/>
-            </a:pPr>
-            <a:r>
-              <a:rPr lang="en-US" sz="1400" dirty="0">
-                <a:solidFill>
-                  <a:srgbClr val="A9C6BF"/>
-                </a:solidFill>
-                <a:latin typeface="Calibri" pitchFamily="34" charset="0"/>
-                <a:ea typeface="Calibri" pitchFamily="34" charset="-122"/>
-                <a:cs typeface="Calibri" pitchFamily="34" charset="-120"/>
-              </a:rPr>
-              <a:t>Instructions will be added to this guide once the page is finished.</a:t>
-            </a:r>
-            <a:endParaRPr lang="en-US" sz="1400" dirty="0"/>
           </a:p>
         </p:txBody>
       </p:sp>
@@ -17835,7 +17304,7 @@
                 <a:ea typeface="Cambria" pitchFamily="34" charset="-122"/>
                 <a:cs typeface="Cambria" pitchFamily="34" charset="-120"/>
               </a:rPr>
-              <a:t>6</a:t>
+              <a:t>5</a:t>
             </a:r>
             <a:endParaRPr lang="en-US" sz="6200" dirty="0"/>
           </a:p>
@@ -17874,7 +17343,7 @@
                 <a:ea typeface="Calibri" pitchFamily="34" charset="-122"/>
                 <a:cs typeface="Calibri" pitchFamily="34" charset="-120"/>
               </a:rPr>
-              <a:t>MODULE 6</a:t>
+              <a:t>MODULE 5</a:t>
             </a:r>
             <a:endParaRPr lang="en-US" sz="1200" dirty="0"/>
           </a:p>
@@ -18055,7 +17524,7 @@
                 <a:ea typeface="Calibri" pitchFamily="34" charset="-122"/>
                 <a:cs typeface="Calibri" pitchFamily="34" charset="-120"/>
               </a:rPr>
-              <a:t>MODULE 6</a:t>
+              <a:t>MODULE 5</a:t>
             </a:r>
             <a:endParaRPr lang="en-US" sz="1100" dirty="0"/>
           </a:p>
@@ -19201,7 +18670,7 @@
                 <a:ea typeface="Calibri" pitchFamily="34" charset="-122"/>
                 <a:cs typeface="Calibri" pitchFamily="34" charset="-120"/>
               </a:rPr>
-              <a:t>Module 6 - Fleet Penetration Simulator</a:t>
+              <a:t>Module 5 - Fleet Penetration Simulator</a:t>
             </a:r>
             <a:endParaRPr lang="en-US" sz="900" dirty="0"/>
           </a:p>
@@ -19304,7 +18773,7 @@
                 <a:ea typeface="Calibri" pitchFamily="34" charset="-122"/>
                 <a:cs typeface="Calibri" pitchFamily="34" charset="-120"/>
               </a:rPr>
-              <a:t>MODULE 6</a:t>
+              <a:t>MODULE 5</a:t>
             </a:r>
             <a:endParaRPr lang="en-US" sz="1100" dirty="0"/>
           </a:p>
@@ -20397,7 +19866,7 @@
                 <a:ea typeface="Calibri" pitchFamily="34" charset="-122"/>
                 <a:cs typeface="Calibri" pitchFamily="34" charset="-120"/>
               </a:rPr>
-              <a:t>Module 6 - Fleet Penetration Simulator</a:t>
+              <a:t>Module 5 - Fleet Penetration Simulator</a:t>
             </a:r>
             <a:endParaRPr lang="en-US" sz="900" dirty="0"/>
           </a:p>
@@ -20500,7 +19969,7 @@
                 <a:ea typeface="Calibri" pitchFamily="34" charset="-122"/>
                 <a:cs typeface="Calibri" pitchFamily="34" charset="-120"/>
               </a:rPr>
-              <a:t>MODULE 6</a:t>
+              <a:t>MODULE 5</a:t>
             </a:r>
             <a:endParaRPr lang="en-US" sz="1100" dirty="0"/>
           </a:p>
@@ -21638,7 +21107,7 @@
                 <a:ea typeface="Calibri" pitchFamily="34" charset="-122"/>
                 <a:cs typeface="Calibri" pitchFamily="34" charset="-120"/>
               </a:rPr>
-              <a:t>Module 6 - Fleet Penetration Simulator</a:t>
+              <a:t>Module 5 - Fleet Penetration Simulator</a:t>
             </a:r>
             <a:endParaRPr lang="en-US" sz="900" dirty="0"/>
           </a:p>
@@ -21779,7 +21248,7 @@
                 <a:ea typeface="Cambria" pitchFamily="34" charset="-122"/>
                 <a:cs typeface="Cambria" pitchFamily="34" charset="-120"/>
               </a:rPr>
-              <a:t>7</a:t>
+              <a:t>6</a:t>
             </a:r>
             <a:endParaRPr lang="en-US" sz="6200" dirty="0"/>
           </a:p>
@@ -21818,7 +21287,7 @@
                 <a:ea typeface="Calibri" pitchFamily="34" charset="-122"/>
                 <a:cs typeface="Calibri" pitchFamily="34" charset="-120"/>
               </a:rPr>
-              <a:t>MODULE 7</a:t>
+              <a:t>MODULE 6</a:t>
             </a:r>
             <a:endParaRPr lang="en-US" sz="1200" dirty="0"/>
           </a:p>
@@ -21999,7 +21468,7 @@
                 <a:ea typeface="Calibri" pitchFamily="34" charset="-122"/>
                 <a:cs typeface="Calibri" pitchFamily="34" charset="-120"/>
               </a:rPr>
-              <a:t>MODULE 7</a:t>
+              <a:t>MODULE 6</a:t>
             </a:r>
             <a:endParaRPr lang="en-US" sz="1100" dirty="0"/>
           </a:p>
@@ -23238,7 +22707,7 @@
                 <a:ea typeface="Calibri" pitchFamily="34" charset="-122"/>
                 <a:cs typeface="Calibri" pitchFamily="34" charset="-120"/>
               </a:rPr>
-              <a:t>Module 7 - Emissions Impact Calculator</a:t>
+              <a:t>Module 6 - Emissions Impact Calculator</a:t>
             </a:r>
             <a:endParaRPr lang="en-US" sz="900" dirty="0"/>
           </a:p>
@@ -24647,7 +24116,7 @@
                 <a:ea typeface="Calibri" pitchFamily="34" charset="-122"/>
                 <a:cs typeface="Calibri" pitchFamily="34" charset="-120"/>
               </a:rPr>
-              <a:t>MODULE 7</a:t>
+              <a:t>MODULE 6</a:t>
             </a:r>
             <a:endParaRPr lang="en-US" sz="1100" dirty="0"/>
           </a:p>
@@ -25479,7 +24948,7 @@
                 <a:ea typeface="Calibri" pitchFamily="34" charset="-122"/>
                 <a:cs typeface="Calibri" pitchFamily="34" charset="-120"/>
               </a:rPr>
-              <a:t>Module 7 - Emissions Impact Calculator</a:t>
+              <a:t>Module 6 - Emissions Impact Calculator</a:t>
             </a:r>
             <a:endParaRPr lang="en-US" sz="900" dirty="0"/>
           </a:p>
@@ -25620,7 +25089,7 @@
                 <a:ea typeface="Cambria" pitchFamily="34" charset="-122"/>
                 <a:cs typeface="Cambria" pitchFamily="34" charset="-120"/>
               </a:rPr>
-              <a:t>8</a:t>
+              <a:t>7</a:t>
             </a:r>
             <a:endParaRPr lang="en-US" sz="6200" dirty="0"/>
           </a:p>
@@ -25659,7 +25128,7 @@
                 <a:ea typeface="Calibri" pitchFamily="34" charset="-122"/>
                 <a:cs typeface="Calibri" pitchFamily="34" charset="-120"/>
               </a:rPr>
-              <a:t>MODULE 8</a:t>
+              <a:t>MODULE 7</a:t>
             </a:r>
             <a:endParaRPr lang="en-US" sz="1200" dirty="0"/>
           </a:p>
@@ -25840,7 +25309,7 @@
                 <a:ea typeface="Calibri" pitchFamily="34" charset="-122"/>
                 <a:cs typeface="Calibri" pitchFamily="34" charset="-120"/>
               </a:rPr>
-              <a:t>MODULE 8</a:t>
+              <a:t>MODULE 7</a:t>
             </a:r>
             <a:endParaRPr lang="en-US" sz="1100" dirty="0"/>
           </a:p>
@@ -26210,7 +25679,7 @@
                 <a:ea typeface="Calibri" pitchFamily="34" charset="-122"/>
                 <a:cs typeface="Calibri" pitchFamily="34" charset="-120"/>
               </a:rPr>
-              <a:t>Click '8. Gas &amp; Energy Price Tracker' in the sidebar.</a:t>
+              <a:t>Click '7. Gas &amp; Energy Price Tracker' in the sidebar.</a:t>
             </a:r>
             <a:endParaRPr lang="en-US" sz="1150" dirty="0"/>
           </a:p>
@@ -27097,7 +26566,7 @@
                 <a:ea typeface="Calibri" pitchFamily="34" charset="-122"/>
                 <a:cs typeface="Calibri" pitchFamily="34" charset="-120"/>
               </a:rPr>
-              <a:t>Module 8 - Gas &amp; Energy Price Tracker</a:t>
+              <a:t>Module 7 - Gas &amp; Energy Price Tracker</a:t>
             </a:r>
             <a:endParaRPr lang="en-US" sz="900" dirty="0"/>
           </a:p>
@@ -28045,7 +27514,7 @@
                 <a:ea typeface="Calibri" pitchFamily="34" charset="-122"/>
                 <a:cs typeface="Calibri" pitchFamily="34" charset="-120"/>
               </a:rPr>
-              <a:t>set Global settings before using Modules 3, 4, 7 and 8. Everything else follows from those prices.</a:t>
+              <a:t>set Global settings before using Modules 3, 4, 6 and 7. Everything else follows from those prices.</a:t>
             </a:r>
             <a:endParaRPr lang="en-US" sz="1100" dirty="0"/>
           </a:p>
@@ -28632,7 +28101,7 @@
                 <a:ea typeface="Calibri" pitchFamily="34" charset="-122"/>
                 <a:cs typeface="Calibri" pitchFamily="34" charset="-120"/>
               </a:rPr>
-              <a:t>Try Module 7, emissions</a:t>
+              <a:t>Try Module 6, emissions</a:t>
             </a:r>
             <a:endParaRPr lang="en-US" sz="1500" dirty="0"/>
           </a:p>
@@ -28924,7 +28393,7 @@
                 <a:ea typeface="Calibri" pitchFamily="34" charset="-122"/>
                 <a:cs typeface="Calibri" pitchFamily="34" charset="-120"/>
               </a:rPr>
-              <a:t>Explore Modules 4, 6 and 8</a:t>
+              <a:t>Explore Modules 4, 5 and 7</a:t>
             </a:r>
             <a:endParaRPr lang="en-US" sz="1500" dirty="0"/>
           </a:p>
@@ -29144,7 +28613,7 @@
                 <a:ea typeface="Calibri" pitchFamily="34" charset="-122"/>
                 <a:cs typeface="Calibri" pitchFamily="34" charset="-120"/>
               </a:rPr>
-              <a:t>Every page shares the same three areas. Once you know these, all eight modules work the same way.</a:t>
+              <a:t>Every page shares the same three areas. Once you know these, all seven modules work the same way.</a:t>
             </a:r>
             <a:endParaRPr lang="en-US" sz="1300" dirty="0"/>
           </a:p>
@@ -30083,7 +29552,7 @@
                 <a:ea typeface="Calibri" pitchFamily="34" charset="-122"/>
                 <a:cs typeface="Calibri" pitchFamily="34" charset="-120"/>
               </a:rPr>
-              <a:t>It shows one card for each of the eight pages in the dashboard.</a:t>
+              <a:t>It shows one card for each of the seven pages in the dashboard.</a:t>
             </a:r>
             <a:endParaRPr lang="en-US" sz="1150" dirty="0"/>
           </a:p>
@@ -30807,7 +30276,7 @@
                 <a:ea typeface="Calibri" pitchFamily="34" charset="-122"/>
                 <a:cs typeface="Calibri" pitchFamily="34" charset="-120"/>
               </a:rPr>
-              <a:t>The home page showing all eight module cards</a:t>
+              <a:t>The home page showing all seven module cards</a:t>
             </a:r>
             <a:endParaRPr lang="en-US" sz="1250" dirty="0"/>
           </a:p>
